--- a/中間発表.pptx
+++ b/中間発表.pptx
@@ -4062,7 +4062,7 @@
         </p:nvSpPr>
         <p:spPr>
           <a:xfrm>
-            <a:off x="6493933" y="1632521"/>
+            <a:off x="6527799" y="1632521"/>
             <a:ext cx="5827236" cy="1323439"/>
           </a:xfrm>
           <a:prstGeom prst="rect">
@@ -4219,10 +4219,10 @@
       </p:sp>
       <p:pic>
         <p:nvPicPr>
-          <p:cNvPr id="17" name="図 16">
-            <a:extLst>
-              <a:ext uri="{FF2B5EF4-FFF2-40B4-BE49-F238E27FC236}">
-                <a16:creationId xmlns:a16="http://schemas.microsoft.com/office/drawing/2014/main" id="{785DE9AB-5B86-2DCC-85DA-BC4009A8461E}"/>
+          <p:cNvPr id="14" name="図 13">
+            <a:extLst>
+              <a:ext uri="{FF2B5EF4-FFF2-40B4-BE49-F238E27FC236}">
+                <a16:creationId xmlns:a16="http://schemas.microsoft.com/office/drawing/2014/main" id="{AA00D4D4-391B-07F6-A338-67483DCE298F}"/>
               </a:ext>
             </a:extLst>
           </p:cNvPr>
@@ -4245,12 +4245,18 @@
         </p:blipFill>
         <p:spPr>
           <a:xfrm>
-            <a:off x="5821085" y="2955960"/>
-            <a:ext cx="2827590" cy="1885060"/>
+            <a:off x="6096000" y="2759917"/>
+            <a:ext cx="5939367" cy="3959578"/>
           </a:xfrm>
           <a:prstGeom prst="rect">
             <a:avLst/>
           </a:prstGeom>
+          <a:ln>
+            <a:noFill/>
+          </a:ln>
+          <a:effectLst>
+            <a:softEdge rad="112500"/>
+          </a:effectLst>
         </p:spPr>
       </p:pic>
     </p:spTree>
@@ -4456,7 +4462,7 @@
         <p:spPr>
           <a:xfrm>
             <a:off x="6493933" y="1632521"/>
-            <a:ext cx="3929281" cy="1323439"/>
+            <a:ext cx="5314275" cy="1323439"/>
           </a:xfrm>
           <a:prstGeom prst="rect">
             <a:avLst/>
@@ -4477,6 +4483,10 @@
           </a:p>
           <a:p>
             <a:r>
+              <a:rPr lang="ja-JP" altLang="en-US" sz="4000" dirty="0"/>
+              <a:t>　　　　　　</a:t>
+            </a:r>
+            <a:r>
               <a:rPr lang="ja-JP" altLang="ja-JP" sz="4000" dirty="0"/>
               <a:t>イメージ</a:t>
             </a:r>
@@ -4499,7 +4509,7 @@
         <p:spPr>
           <a:xfrm>
             <a:off x="373984" y="2436752"/>
-            <a:ext cx="6255239" cy="646331"/>
+            <a:ext cx="5562741" cy="646331"/>
           </a:xfrm>
           <a:prstGeom prst="rect">
             <a:avLst/>
@@ -4514,14 +4524,14 @@
           <a:p>
             <a:r>
               <a:rPr lang="ja-JP" altLang="ja-JP" dirty="0"/>
-              <a:t>3D観光マップを制作し、観光地の位置関係を分かりやすく</a:t>
+              <a:t>3D観光マップを制作し、観光地の位置関係を分かり</a:t>
             </a:r>
             <a:endParaRPr lang="en-US" altLang="ja-JP" dirty="0"/>
           </a:p>
           <a:p>
             <a:r>
               <a:rPr lang="ja-JP" altLang="ja-JP" dirty="0"/>
-              <a:t>伝え、観光ルートの検討を支援する。</a:t>
+              <a:t>やすく伝え、観光ルートの検討を支援する。</a:t>
             </a:r>
             <a:endParaRPr lang="en-US" altLang="ja-JP" dirty="0"/>
           </a:p>

--- a/中間発表.pptx
+++ b/中間発表.pptx
@@ -7,8 +7,8 @@
   <p:sldIdLst>
     <p:sldId id="256" r:id="rId2"/>
     <p:sldId id="257" r:id="rId3"/>
-    <p:sldId id="258" r:id="rId4"/>
-    <p:sldId id="259" r:id="rId5"/>
+    <p:sldId id="259" r:id="rId4"/>
+    <p:sldId id="258" r:id="rId5"/>
   </p:sldIdLst>
   <p:sldSz cx="12192000" cy="6858000"/>
   <p:notesSz cx="6858000" cy="9144000"/>
@@ -4291,385 +4291,594 @@
       </p:grpSpPr>
       <p:sp>
         <p:nvSpPr>
-          <p:cNvPr id="7" name="テキスト ボックス 6">
-            <a:extLst>
-              <a:ext uri="{FF2B5EF4-FFF2-40B4-BE49-F238E27FC236}">
-                <a16:creationId xmlns:a16="http://schemas.microsoft.com/office/drawing/2014/main" id="{CCC98E16-5F13-0DA0-1425-125583AD472E}"/>
-              </a:ext>
-            </a:extLst>
-          </p:cNvPr>
-          <p:cNvSpPr txBox="1"/>
+          <p:cNvPr id="2" name="正方形/長方形 1">
+            <a:extLst>
+              <a:ext uri="{FF2B5EF4-FFF2-40B4-BE49-F238E27FC236}">
+                <a16:creationId xmlns:a16="http://schemas.microsoft.com/office/drawing/2014/main" id="{E0FB657D-2D53-440F-5851-A7E17426855B}"/>
+              </a:ext>
+            </a:extLst>
+          </p:cNvPr>
+          <p:cNvSpPr/>
           <p:nvPr/>
         </p:nvSpPr>
         <p:spPr>
           <a:xfrm>
-            <a:off x="0" y="275092"/>
-            <a:ext cx="12192000" cy="707886"/>
-          </a:xfrm>
-          <a:prstGeom prst="rect">
-            <a:avLst/>
-          </a:prstGeom>
-          <a:solidFill>
-            <a:srgbClr val="00B050"/>
-          </a:solidFill>
-        </p:spPr>
-        <p:txBody>
-          <a:bodyPr wrap="square" rtlCol="0">
-            <a:spAutoFit/>
-          </a:bodyPr>
-          <a:lstStyle/>
-          <a:p>
-            <a:r>
-              <a:rPr lang="en-US" altLang="ja-JP" sz="4000" dirty="0"/>
-              <a:t> </a:t>
-            </a:r>
-            <a:r>
-              <a:rPr lang="ja-JP" altLang="ja-JP" sz="4000" dirty="0"/>
-              <a:t>テーマ②</a:t>
-            </a:r>
-            <a:r>
-              <a:rPr lang="ja-JP" altLang="en-US" sz="4000" dirty="0"/>
-              <a:t>：</a:t>
-            </a:r>
-            <a:r>
-              <a:rPr lang="ja-JP" altLang="ja-JP" sz="4000" dirty="0"/>
-              <a:t>日田市3D観光マップの制作</a:t>
-            </a:r>
-            <a:endParaRPr lang="ja-JP" altLang="en-US" sz="4000" dirty="0"/>
-          </a:p>
-        </p:txBody>
-      </p:sp>
-      <p:sp>
-        <p:nvSpPr>
-          <p:cNvPr id="8" name="テキスト ボックス 7">
-            <a:extLst>
-              <a:ext uri="{FF2B5EF4-FFF2-40B4-BE49-F238E27FC236}">
-                <a16:creationId xmlns:a16="http://schemas.microsoft.com/office/drawing/2014/main" id="{C852921C-AD2C-6772-24AC-D976DE93A5F2}"/>
-              </a:ext>
-            </a:extLst>
-          </p:cNvPr>
-          <p:cNvSpPr txBox="1"/>
-          <p:nvPr/>
-        </p:nvSpPr>
-        <p:spPr>
-          <a:xfrm>
-            <a:off x="373984" y="3179428"/>
-            <a:ext cx="1210588" cy="707886"/>
+            <a:off x="1202835" y="650513"/>
+            <a:ext cx="9653364" cy="5155006"/>
           </a:xfrm>
           <a:prstGeom prst="rect">
             <a:avLst/>
           </a:prstGeom>
           <a:noFill/>
         </p:spPr>
-        <p:txBody>
-          <a:bodyPr wrap="none" rtlCol="0">
-            <a:spAutoFit/>
-          </a:bodyPr>
-          <a:lstStyle/>
-          <a:p>
-            <a:r>
-              <a:rPr lang="ja-JP" altLang="en-US" sz="4000" dirty="0"/>
-              <a:t>背景</a:t>
-            </a:r>
-            <a:endParaRPr kumimoji="1" lang="ja-JP" altLang="en-US" sz="4000" dirty="0"/>
-          </a:p>
-        </p:txBody>
-      </p:sp>
-      <p:sp>
-        <p:nvSpPr>
-          <p:cNvPr id="9" name="テキスト ボックス 8">
-            <a:extLst>
-              <a:ext uri="{FF2B5EF4-FFF2-40B4-BE49-F238E27FC236}">
-                <a16:creationId xmlns:a16="http://schemas.microsoft.com/office/drawing/2014/main" id="{EEF6E7DC-850B-0DC5-FB21-055494602BFC}"/>
-              </a:ext>
-            </a:extLst>
-          </p:cNvPr>
-          <p:cNvSpPr txBox="1"/>
+        <p:style>
+          <a:lnRef idx="2">
+            <a:schemeClr val="accent1">
+              <a:shade val="15000"/>
+            </a:schemeClr>
+          </a:lnRef>
+          <a:fillRef idx="1">
+            <a:schemeClr val="accent1"/>
+          </a:fillRef>
+          <a:effectRef idx="0">
+            <a:schemeClr val="accent1"/>
+          </a:effectRef>
+          <a:fontRef idx="minor">
+            <a:schemeClr val="lt1"/>
+          </a:fontRef>
+        </p:style>
+        <p:txBody>
+          <a:bodyPr rtlCol="0" anchor="ctr"/>
+          <a:lstStyle/>
+          <a:p>
+            <a:pPr algn="ctr"/>
+            <a:endParaRPr kumimoji="1" lang="ja-JP" altLang="en-US"/>
+          </a:p>
+        </p:txBody>
+      </p:sp>
+      <p:sp>
+        <p:nvSpPr>
+          <p:cNvPr id="3" name="正方形/長方形 2">
+            <a:extLst>
+              <a:ext uri="{FF2B5EF4-FFF2-40B4-BE49-F238E27FC236}">
+                <a16:creationId xmlns:a16="http://schemas.microsoft.com/office/drawing/2014/main" id="{92C250D1-A83B-0173-8484-77C66E93B19F}"/>
+              </a:ext>
+            </a:extLst>
+          </p:cNvPr>
+          <p:cNvSpPr/>
           <p:nvPr/>
         </p:nvSpPr>
         <p:spPr>
           <a:xfrm>
-            <a:off x="373984" y="1632521"/>
-            <a:ext cx="1210588" cy="707886"/>
+            <a:off x="1528091" y="1000317"/>
+            <a:ext cx="9015125" cy="638239"/>
           </a:xfrm>
           <a:prstGeom prst="rect">
             <a:avLst/>
           </a:prstGeom>
-          <a:noFill/>
-        </p:spPr>
-        <p:txBody>
-          <a:bodyPr wrap="none" rtlCol="0">
-            <a:spAutoFit/>
-          </a:bodyPr>
-          <a:lstStyle/>
-          <a:p>
-            <a:r>
-              <a:rPr lang="ja-JP" altLang="en-US" sz="4000" dirty="0"/>
-              <a:t>目的</a:t>
-            </a:r>
-            <a:endParaRPr kumimoji="1" lang="ja-JP" altLang="en-US" sz="4000" dirty="0"/>
-          </a:p>
-        </p:txBody>
-      </p:sp>
-      <p:sp>
-        <p:nvSpPr>
-          <p:cNvPr id="10" name="テキスト ボックス 9">
-            <a:extLst>
-              <a:ext uri="{FF2B5EF4-FFF2-40B4-BE49-F238E27FC236}">
-                <a16:creationId xmlns:a16="http://schemas.microsoft.com/office/drawing/2014/main" id="{335AA4BA-D50D-A2A1-3CD2-C00382F7C42B}"/>
-              </a:ext>
-            </a:extLst>
-          </p:cNvPr>
-          <p:cNvSpPr txBox="1"/>
+        </p:spPr>
+        <p:style>
+          <a:lnRef idx="2">
+            <a:schemeClr val="accent1">
+              <a:shade val="15000"/>
+            </a:schemeClr>
+          </a:lnRef>
+          <a:fillRef idx="1">
+            <a:schemeClr val="accent1"/>
+          </a:fillRef>
+          <a:effectRef idx="0">
+            <a:schemeClr val="accent1"/>
+          </a:effectRef>
+          <a:fontRef idx="minor">
+            <a:schemeClr val="lt1"/>
+          </a:fontRef>
+        </p:style>
+        <p:txBody>
+          <a:bodyPr rtlCol="0" anchor="ctr"/>
+          <a:lstStyle/>
+          <a:p>
+            <a:pPr algn="ctr"/>
+            <a:r>
+              <a:rPr kumimoji="1" lang="ja-JP" altLang="en-US" dirty="0"/>
+              <a:t>ヘッダー</a:t>
+            </a:r>
+          </a:p>
+        </p:txBody>
+      </p:sp>
+      <p:sp>
+        <p:nvSpPr>
+          <p:cNvPr id="4" name="正方形/長方形 3">
+            <a:extLst>
+              <a:ext uri="{FF2B5EF4-FFF2-40B4-BE49-F238E27FC236}">
+                <a16:creationId xmlns:a16="http://schemas.microsoft.com/office/drawing/2014/main" id="{74186C76-2E3A-15BC-C519-5A484AE39DA4}"/>
+              </a:ext>
+            </a:extLst>
+          </p:cNvPr>
+          <p:cNvSpPr/>
           <p:nvPr/>
         </p:nvSpPr>
         <p:spPr>
           <a:xfrm>
-            <a:off x="373984" y="4726336"/>
-            <a:ext cx="1210588" cy="707886"/>
+            <a:off x="1528091" y="1779705"/>
+            <a:ext cx="1632419" cy="3804886"/>
           </a:xfrm>
           <a:prstGeom prst="rect">
             <a:avLst/>
           </a:prstGeom>
-          <a:noFill/>
-        </p:spPr>
-        <p:txBody>
-          <a:bodyPr wrap="none" rtlCol="0">
-            <a:spAutoFit/>
-          </a:bodyPr>
-          <a:lstStyle/>
-          <a:p>
-            <a:r>
-              <a:rPr lang="ja-JP" altLang="en-US" sz="4000" dirty="0"/>
-              <a:t>概要</a:t>
-            </a:r>
-            <a:endParaRPr kumimoji="1" lang="ja-JP" altLang="en-US" sz="4000" dirty="0"/>
-          </a:p>
-        </p:txBody>
-      </p:sp>
-      <p:sp>
-        <p:nvSpPr>
-          <p:cNvPr id="11" name="テキスト ボックス 10">
-            <a:extLst>
-              <a:ext uri="{FF2B5EF4-FFF2-40B4-BE49-F238E27FC236}">
-                <a16:creationId xmlns:a16="http://schemas.microsoft.com/office/drawing/2014/main" id="{1C0353BC-833C-2DCB-D40A-4A62CDBC6EA7}"/>
-              </a:ext>
-            </a:extLst>
-          </p:cNvPr>
-          <p:cNvSpPr txBox="1"/>
+        </p:spPr>
+        <p:style>
+          <a:lnRef idx="2">
+            <a:schemeClr val="accent1">
+              <a:shade val="15000"/>
+            </a:schemeClr>
+          </a:lnRef>
+          <a:fillRef idx="1">
+            <a:schemeClr val="accent1"/>
+          </a:fillRef>
+          <a:effectRef idx="0">
+            <a:schemeClr val="accent1"/>
+          </a:effectRef>
+          <a:fontRef idx="minor">
+            <a:schemeClr val="lt1"/>
+          </a:fontRef>
+        </p:style>
+        <p:txBody>
+          <a:bodyPr rtlCol="0" anchor="ctr"/>
+          <a:lstStyle/>
+          <a:p>
+            <a:pPr algn="ctr"/>
+            <a:r>
+              <a:rPr kumimoji="1" lang="ja-JP" altLang="en-US" dirty="0"/>
+              <a:t>ナビゲーションエリア</a:t>
+            </a:r>
+          </a:p>
+        </p:txBody>
+      </p:sp>
+      <p:sp>
+        <p:nvSpPr>
+          <p:cNvPr id="5" name="正方形/長方形 4">
+            <a:extLst>
+              <a:ext uri="{FF2B5EF4-FFF2-40B4-BE49-F238E27FC236}">
+                <a16:creationId xmlns:a16="http://schemas.microsoft.com/office/drawing/2014/main" id="{BF1BA5E2-9AB9-1FC4-99E9-0616CE777E54}"/>
+              </a:ext>
+            </a:extLst>
+          </p:cNvPr>
+          <p:cNvSpPr/>
           <p:nvPr/>
         </p:nvSpPr>
         <p:spPr>
           <a:xfrm>
-            <a:off x="6493933" y="1632521"/>
-            <a:ext cx="5314275" cy="1323439"/>
+            <a:off x="3301659" y="1779705"/>
+            <a:ext cx="7241557" cy="447994"/>
           </a:xfrm>
           <a:prstGeom prst="rect">
             <a:avLst/>
           </a:prstGeom>
-          <a:noFill/>
-        </p:spPr>
-        <p:txBody>
-          <a:bodyPr wrap="none" rtlCol="0">
-            <a:spAutoFit/>
-          </a:bodyPr>
-          <a:lstStyle/>
-          <a:p>
-            <a:r>
-              <a:rPr lang="ja-JP" altLang="ja-JP" sz="4000" dirty="0"/>
-              <a:t>3Dマップの完成</a:t>
-            </a:r>
-            <a:endParaRPr lang="en-US" altLang="ja-JP" sz="4000" dirty="0"/>
-          </a:p>
-          <a:p>
-            <a:r>
-              <a:rPr lang="ja-JP" altLang="en-US" sz="4000" dirty="0"/>
-              <a:t>　　　　　　</a:t>
-            </a:r>
-            <a:r>
-              <a:rPr lang="ja-JP" altLang="ja-JP" sz="4000" dirty="0"/>
-              <a:t>イメージ</a:t>
-            </a:r>
-            <a:endParaRPr lang="en-US" altLang="ja-JP" sz="4000" dirty="0"/>
-          </a:p>
-        </p:txBody>
-      </p:sp>
-      <p:sp>
-        <p:nvSpPr>
-          <p:cNvPr id="12" name="テキスト ボックス 11">
-            <a:extLst>
-              <a:ext uri="{FF2B5EF4-FFF2-40B4-BE49-F238E27FC236}">
-                <a16:creationId xmlns:a16="http://schemas.microsoft.com/office/drawing/2014/main" id="{0D0BFB82-D13B-1FC7-5611-C10829CA8C74}"/>
-              </a:ext>
-            </a:extLst>
-          </p:cNvPr>
-          <p:cNvSpPr txBox="1"/>
+        </p:spPr>
+        <p:style>
+          <a:lnRef idx="2">
+            <a:schemeClr val="accent1">
+              <a:shade val="15000"/>
+            </a:schemeClr>
+          </a:lnRef>
+          <a:fillRef idx="1">
+            <a:schemeClr val="accent1"/>
+          </a:fillRef>
+          <a:effectRef idx="0">
+            <a:schemeClr val="accent1"/>
+          </a:effectRef>
+          <a:fontRef idx="minor">
+            <a:schemeClr val="lt1"/>
+          </a:fontRef>
+        </p:style>
+        <p:txBody>
+          <a:bodyPr rtlCol="0" anchor="ctr"/>
+          <a:lstStyle/>
+          <a:p>
+            <a:pPr algn="ctr"/>
+            <a:endParaRPr kumimoji="1" lang="ja-JP" altLang="en-US"/>
+          </a:p>
+        </p:txBody>
+      </p:sp>
+      <p:sp>
+        <p:nvSpPr>
+          <p:cNvPr id="6" name="正方形/長方形 5">
+            <a:extLst>
+              <a:ext uri="{FF2B5EF4-FFF2-40B4-BE49-F238E27FC236}">
+                <a16:creationId xmlns:a16="http://schemas.microsoft.com/office/drawing/2014/main" id="{EACBADA8-AB4D-890F-9A53-80238AFEDC06}"/>
+              </a:ext>
+            </a:extLst>
+          </p:cNvPr>
+          <p:cNvSpPr/>
           <p:nvPr/>
         </p:nvSpPr>
         <p:spPr>
           <a:xfrm>
-            <a:off x="373984" y="2436752"/>
-            <a:ext cx="5562741" cy="646331"/>
+            <a:off x="3344617" y="2313615"/>
+            <a:ext cx="7198599" cy="3252564"/>
           </a:xfrm>
           <a:prstGeom prst="rect">
             <a:avLst/>
           </a:prstGeom>
-          <a:noFill/>
-        </p:spPr>
-        <p:txBody>
-          <a:bodyPr wrap="none" rtlCol="0">
-            <a:spAutoFit/>
-          </a:bodyPr>
-          <a:lstStyle/>
-          <a:p>
-            <a:r>
-              <a:rPr lang="ja-JP" altLang="ja-JP" dirty="0"/>
-              <a:t>3D観光マップを制作し、観光地の位置関係を分かり</a:t>
-            </a:r>
-            <a:endParaRPr lang="en-US" altLang="ja-JP" dirty="0"/>
-          </a:p>
-          <a:p>
-            <a:r>
-              <a:rPr lang="ja-JP" altLang="ja-JP" dirty="0"/>
-              <a:t>やすく伝え、観光ルートの検討を支援する。</a:t>
-            </a:r>
-            <a:endParaRPr lang="en-US" altLang="ja-JP" dirty="0"/>
-          </a:p>
-        </p:txBody>
-      </p:sp>
-      <p:sp>
-        <p:nvSpPr>
-          <p:cNvPr id="13" name="テキスト ボックス 12">
-            <a:extLst>
-              <a:ext uri="{FF2B5EF4-FFF2-40B4-BE49-F238E27FC236}">
-                <a16:creationId xmlns:a16="http://schemas.microsoft.com/office/drawing/2014/main" id="{DE2C3D34-4593-CEAA-0C72-02A5DE70DE78}"/>
-              </a:ext>
-            </a:extLst>
-          </p:cNvPr>
-          <p:cNvSpPr txBox="1"/>
+        </p:spPr>
+        <p:style>
+          <a:lnRef idx="2">
+            <a:schemeClr val="accent1">
+              <a:shade val="15000"/>
+            </a:schemeClr>
+          </a:lnRef>
+          <a:fillRef idx="1">
+            <a:schemeClr val="accent1"/>
+          </a:fillRef>
+          <a:effectRef idx="0">
+            <a:schemeClr val="accent1"/>
+          </a:effectRef>
+          <a:fontRef idx="minor">
+            <a:schemeClr val="lt1"/>
+          </a:fontRef>
+        </p:style>
+        <p:txBody>
+          <a:bodyPr rtlCol="0" anchor="ctr"/>
+          <a:lstStyle/>
+          <a:p>
+            <a:pPr algn="ctr"/>
+            <a:r>
+              <a:rPr kumimoji="1" lang="en-US" altLang="ja-JP" dirty="0"/>
+              <a:t>Spot1</a:t>
+            </a:r>
+            <a:r>
+              <a:rPr kumimoji="1" lang="ja-JP" altLang="en-US" dirty="0"/>
+              <a:t>の紹介</a:t>
+            </a:r>
+          </a:p>
+        </p:txBody>
+      </p:sp>
+      <p:sp>
+        <p:nvSpPr>
+          <p:cNvPr id="7" name="正方形/長方形 6">
+            <a:extLst>
+              <a:ext uri="{FF2B5EF4-FFF2-40B4-BE49-F238E27FC236}">
+                <a16:creationId xmlns:a16="http://schemas.microsoft.com/office/drawing/2014/main" id="{D52DF0FA-E04B-9397-FDE9-839F2FDCF454}"/>
+              </a:ext>
+            </a:extLst>
+          </p:cNvPr>
+          <p:cNvSpPr/>
           <p:nvPr/>
         </p:nvSpPr>
         <p:spPr>
           <a:xfrm>
-            <a:off x="373984" y="3983659"/>
-            <a:ext cx="5562741" cy="646331"/>
+            <a:off x="3436671" y="1834937"/>
+            <a:ext cx="1043275" cy="276162"/>
           </a:xfrm>
           <a:prstGeom prst="rect">
             <a:avLst/>
           </a:prstGeom>
-          <a:noFill/>
-        </p:spPr>
-        <p:txBody>
-          <a:bodyPr wrap="none" rtlCol="0">
-            <a:spAutoFit/>
-          </a:bodyPr>
-          <a:lstStyle/>
-          <a:p>
-            <a:r>
-              <a:rPr lang="ja-JP" altLang="ja-JP" dirty="0"/>
-              <a:t>従来の地図では伝わりにくい位置関係を、</a:t>
-            </a:r>
+        </p:spPr>
+        <p:style>
+          <a:lnRef idx="2">
+            <a:schemeClr val="accent1">
+              <a:shade val="15000"/>
+            </a:schemeClr>
+          </a:lnRef>
+          <a:fillRef idx="1">
+            <a:schemeClr val="accent1"/>
+          </a:fillRef>
+          <a:effectRef idx="0">
+            <a:schemeClr val="accent1"/>
+          </a:effectRef>
+          <a:fontRef idx="minor">
+            <a:schemeClr val="lt1"/>
+          </a:fontRef>
+        </p:style>
+        <p:txBody>
+          <a:bodyPr rtlCol="0" anchor="ctr"/>
+          <a:lstStyle/>
+          <a:p>
+            <a:pPr algn="ctr"/>
             <a:r>
               <a:rPr lang="en-US" altLang="ja-JP" dirty="0"/>
-              <a:t>3D</a:t>
-            </a:r>
-            <a:r>
-              <a:rPr lang="ja-JP" altLang="ja-JP" dirty="0"/>
-              <a:t>技術を</a:t>
-            </a:r>
-            <a:endParaRPr lang="en-US" altLang="ja-JP" dirty="0"/>
-          </a:p>
-          <a:p>
-            <a:r>
-              <a:rPr lang="ja-JP" altLang="ja-JP" dirty="0"/>
-              <a:t>使って分かりやすく伝えたい。</a:t>
-            </a:r>
-          </a:p>
-        </p:txBody>
-      </p:sp>
-      <p:sp>
-        <p:nvSpPr>
-          <p:cNvPr id="14" name="テキスト ボックス 13">
-            <a:extLst>
-              <a:ext uri="{FF2B5EF4-FFF2-40B4-BE49-F238E27FC236}">
-                <a16:creationId xmlns:a16="http://schemas.microsoft.com/office/drawing/2014/main" id="{02248BEF-2F20-0A4B-250B-6C9E4B250B9B}"/>
-              </a:ext>
-            </a:extLst>
-          </p:cNvPr>
-          <p:cNvSpPr txBox="1"/>
+              <a:t>Spot1</a:t>
+            </a:r>
+            <a:endParaRPr kumimoji="1" lang="ja-JP" altLang="en-US" dirty="0"/>
+          </a:p>
+        </p:txBody>
+      </p:sp>
+      <p:sp>
+        <p:nvSpPr>
+          <p:cNvPr id="9" name="正方形/長方形 8">
+            <a:extLst>
+              <a:ext uri="{FF2B5EF4-FFF2-40B4-BE49-F238E27FC236}">
+                <a16:creationId xmlns:a16="http://schemas.microsoft.com/office/drawing/2014/main" id="{29A2DE29-99FD-F2CC-4E55-EA1D2B1EF0D3}"/>
+              </a:ext>
+            </a:extLst>
+          </p:cNvPr>
+          <p:cNvSpPr/>
           <p:nvPr/>
         </p:nvSpPr>
         <p:spPr>
           <a:xfrm>
-            <a:off x="373984" y="5528734"/>
-            <a:ext cx="5509842" cy="646331"/>
+            <a:off x="4614958" y="1865621"/>
+            <a:ext cx="1043275" cy="276162"/>
           </a:xfrm>
           <a:prstGeom prst="rect">
             <a:avLst/>
           </a:prstGeom>
-          <a:noFill/>
-        </p:spPr>
-        <p:txBody>
-          <a:bodyPr wrap="none" rtlCol="0">
-            <a:spAutoFit/>
-          </a:bodyPr>
-          <a:lstStyle/>
-          <a:p>
-            <a:r>
-              <a:rPr lang="ja-JP" altLang="ja-JP" dirty="0"/>
-              <a:t>3Dマップを操作しながら観光スポットを確認し、</a:t>
-            </a:r>
-            <a:endParaRPr lang="en-US" altLang="ja-JP" dirty="0"/>
-          </a:p>
-          <a:p>
-            <a:r>
-              <a:rPr lang="ja-JP" altLang="ja-JP" dirty="0"/>
-              <a:t>紹介サイトへ遷移できるWebコンテンツを目指す。</a:t>
-            </a:r>
-            <a:endParaRPr lang="ja-JP" altLang="en-US" dirty="0"/>
-          </a:p>
-        </p:txBody>
-      </p:sp>
-      <p:pic>
-        <p:nvPicPr>
-          <p:cNvPr id="17" name="図 16">
-            <a:extLst>
-              <a:ext uri="{FF2B5EF4-FFF2-40B4-BE49-F238E27FC236}">
-                <a16:creationId xmlns:a16="http://schemas.microsoft.com/office/drawing/2014/main" id="{B83CF779-725A-E42E-82D3-A2CB584357CD}"/>
-              </a:ext>
-            </a:extLst>
-          </p:cNvPr>
-          <p:cNvPicPr>
-            <a:picLocks noChangeAspect="1"/>
-          </p:cNvPicPr>
+        </p:spPr>
+        <p:style>
+          <a:lnRef idx="2">
+            <a:schemeClr val="accent1">
+              <a:shade val="15000"/>
+            </a:schemeClr>
+          </a:lnRef>
+          <a:fillRef idx="1">
+            <a:schemeClr val="accent1"/>
+          </a:fillRef>
+          <a:effectRef idx="0">
+            <a:schemeClr val="accent1"/>
+          </a:effectRef>
+          <a:fontRef idx="minor">
+            <a:schemeClr val="lt1"/>
+          </a:fontRef>
+        </p:style>
+        <p:txBody>
+          <a:bodyPr rtlCol="0" anchor="ctr"/>
+          <a:lstStyle/>
+          <a:p>
+            <a:pPr algn="ctr"/>
+            <a:r>
+              <a:rPr kumimoji="1" lang="en-US" altLang="ja-JP" dirty="0"/>
+              <a:t>Spot2</a:t>
+            </a:r>
+            <a:endParaRPr kumimoji="1" lang="ja-JP" altLang="en-US" dirty="0"/>
+          </a:p>
+        </p:txBody>
+      </p:sp>
+      <p:sp>
+        <p:nvSpPr>
+          <p:cNvPr id="11" name="正方形/長方形 10">
+            <a:extLst>
+              <a:ext uri="{FF2B5EF4-FFF2-40B4-BE49-F238E27FC236}">
+                <a16:creationId xmlns:a16="http://schemas.microsoft.com/office/drawing/2014/main" id="{D064E33A-CECC-F144-C4E7-95333B203D03}"/>
+              </a:ext>
+            </a:extLst>
+          </p:cNvPr>
+          <p:cNvSpPr/>
           <p:nvPr/>
-        </p:nvPicPr>
-        <p:blipFill>
-          <a:blip r:embed="rId2">
-            <a:extLst>
-              <a:ext uri="{28A0092B-C50C-407E-A947-70E740481C1C}">
-                <a14:useLocalDpi xmlns:a14="http://schemas.microsoft.com/office/drawing/2010/main" val="0"/>
-              </a:ext>
-            </a:extLst>
-          </a:blip>
-          <a:stretch>
-            <a:fillRect/>
-          </a:stretch>
-        </p:blipFill>
-        <p:spPr>
-          <a:xfrm>
-            <a:off x="6629223" y="2955960"/>
-            <a:ext cx="5324083" cy="3843988"/>
+        </p:nvSpPr>
+        <p:spPr>
+          <a:xfrm>
+            <a:off x="5879162" y="1850279"/>
+            <a:ext cx="1043275" cy="276162"/>
           </a:xfrm>
           <a:prstGeom prst="rect">
             <a:avLst/>
           </a:prstGeom>
         </p:spPr>
-      </p:pic>
+        <p:style>
+          <a:lnRef idx="2">
+            <a:schemeClr val="accent1">
+              <a:shade val="15000"/>
+            </a:schemeClr>
+          </a:lnRef>
+          <a:fillRef idx="1">
+            <a:schemeClr val="accent1"/>
+          </a:fillRef>
+          <a:effectRef idx="0">
+            <a:schemeClr val="accent1"/>
+          </a:effectRef>
+          <a:fontRef idx="minor">
+            <a:schemeClr val="lt1"/>
+          </a:fontRef>
+        </p:style>
+        <p:txBody>
+          <a:bodyPr rtlCol="0" anchor="ctr"/>
+          <a:lstStyle/>
+          <a:p>
+            <a:pPr algn="ctr"/>
+            <a:endParaRPr kumimoji="1" lang="ja-JP" altLang="en-US"/>
+          </a:p>
+        </p:txBody>
+      </p:sp>
+      <p:sp>
+        <p:nvSpPr>
+          <p:cNvPr id="13" name="正方形/長方形 12">
+            <a:extLst>
+              <a:ext uri="{FF2B5EF4-FFF2-40B4-BE49-F238E27FC236}">
+                <a16:creationId xmlns:a16="http://schemas.microsoft.com/office/drawing/2014/main" id="{26D5989C-F01C-15E2-68A4-B19636E45F80}"/>
+              </a:ext>
+            </a:extLst>
+          </p:cNvPr>
+          <p:cNvSpPr/>
+          <p:nvPr/>
+        </p:nvSpPr>
+        <p:spPr>
+          <a:xfrm>
+            <a:off x="3498040" y="2522271"/>
+            <a:ext cx="6646277" cy="1693788"/>
+          </a:xfrm>
+          <a:prstGeom prst="rect">
+            <a:avLst/>
+          </a:prstGeom>
+        </p:spPr>
+        <p:style>
+          <a:lnRef idx="2">
+            <a:schemeClr val="accent1">
+              <a:shade val="15000"/>
+            </a:schemeClr>
+          </a:lnRef>
+          <a:fillRef idx="1">
+            <a:schemeClr val="accent1"/>
+          </a:fillRef>
+          <a:effectRef idx="0">
+            <a:schemeClr val="accent1"/>
+          </a:effectRef>
+          <a:fontRef idx="minor">
+            <a:schemeClr val="lt1"/>
+          </a:fontRef>
+        </p:style>
+        <p:txBody>
+          <a:bodyPr rtlCol="0" anchor="ctr"/>
+          <a:lstStyle/>
+          <a:p>
+            <a:pPr algn="ctr"/>
+            <a:r>
+              <a:rPr kumimoji="1" lang="ja-JP" altLang="en-US" dirty="0"/>
+              <a:t>文章</a:t>
+            </a:r>
+          </a:p>
+        </p:txBody>
+      </p:sp>
+      <p:sp>
+        <p:nvSpPr>
+          <p:cNvPr id="12" name="正方形/長方形 11">
+            <a:extLst>
+              <a:ext uri="{FF2B5EF4-FFF2-40B4-BE49-F238E27FC236}">
+                <a16:creationId xmlns:a16="http://schemas.microsoft.com/office/drawing/2014/main" id="{2E4BCB96-6AB7-AF5A-9603-CCECB8464DA0}"/>
+              </a:ext>
+            </a:extLst>
+          </p:cNvPr>
+          <p:cNvSpPr/>
+          <p:nvPr/>
+        </p:nvSpPr>
+        <p:spPr>
+          <a:xfrm>
+            <a:off x="3498040" y="2522271"/>
+            <a:ext cx="2528408" cy="1098508"/>
+          </a:xfrm>
+          <a:prstGeom prst="rect">
+            <a:avLst/>
+          </a:prstGeom>
+        </p:spPr>
+        <p:style>
+          <a:lnRef idx="2">
+            <a:schemeClr val="accent1">
+              <a:shade val="15000"/>
+            </a:schemeClr>
+          </a:lnRef>
+          <a:fillRef idx="1">
+            <a:schemeClr val="accent1"/>
+          </a:fillRef>
+          <a:effectRef idx="0">
+            <a:schemeClr val="accent1"/>
+          </a:effectRef>
+          <a:fontRef idx="minor">
+            <a:schemeClr val="lt1"/>
+          </a:fontRef>
+        </p:style>
+        <p:txBody>
+          <a:bodyPr rtlCol="0" anchor="ctr"/>
+          <a:lstStyle/>
+          <a:p>
+            <a:pPr algn="ctr"/>
+            <a:r>
+              <a:rPr kumimoji="1" lang="ja-JP" altLang="en-US" dirty="0"/>
+              <a:t>写真</a:t>
+            </a:r>
+          </a:p>
+        </p:txBody>
+      </p:sp>
+      <p:sp>
+        <p:nvSpPr>
+          <p:cNvPr id="15" name="正方形/長方形 14">
+            <a:extLst>
+              <a:ext uri="{FF2B5EF4-FFF2-40B4-BE49-F238E27FC236}">
+                <a16:creationId xmlns:a16="http://schemas.microsoft.com/office/drawing/2014/main" id="{F36ED989-7B56-5A77-178D-0696780272AB}"/>
+              </a:ext>
+            </a:extLst>
+          </p:cNvPr>
+          <p:cNvSpPr/>
+          <p:nvPr/>
+        </p:nvSpPr>
+        <p:spPr>
+          <a:xfrm>
+            <a:off x="3485766" y="4409371"/>
+            <a:ext cx="6646277" cy="1098508"/>
+          </a:xfrm>
+          <a:prstGeom prst="rect">
+            <a:avLst/>
+          </a:prstGeom>
+        </p:spPr>
+        <p:style>
+          <a:lnRef idx="2">
+            <a:schemeClr val="accent1">
+              <a:shade val="15000"/>
+            </a:schemeClr>
+          </a:lnRef>
+          <a:fillRef idx="1">
+            <a:schemeClr val="accent1"/>
+          </a:fillRef>
+          <a:effectRef idx="0">
+            <a:schemeClr val="accent1"/>
+          </a:effectRef>
+          <a:fontRef idx="minor">
+            <a:schemeClr val="lt1"/>
+          </a:fontRef>
+        </p:style>
+        <p:txBody>
+          <a:bodyPr rtlCol="0" anchor="ctr"/>
+          <a:lstStyle/>
+          <a:p>
+            <a:pPr algn="ctr"/>
+            <a:r>
+              <a:rPr kumimoji="1" lang="ja-JP" altLang="en-US" dirty="0"/>
+              <a:t>文章</a:t>
+            </a:r>
+          </a:p>
+        </p:txBody>
+      </p:sp>
+      <p:sp>
+        <p:nvSpPr>
+          <p:cNvPr id="17" name="正方形/長方形 16">
+            <a:extLst>
+              <a:ext uri="{FF2B5EF4-FFF2-40B4-BE49-F238E27FC236}">
+                <a16:creationId xmlns:a16="http://schemas.microsoft.com/office/drawing/2014/main" id="{F7E619AB-B45E-FD1F-2DF4-DF9B82EA7D29}"/>
+              </a:ext>
+            </a:extLst>
+          </p:cNvPr>
+          <p:cNvSpPr/>
+          <p:nvPr/>
+        </p:nvSpPr>
+        <p:spPr>
+          <a:xfrm>
+            <a:off x="3485766" y="4409371"/>
+            <a:ext cx="2528408" cy="1098508"/>
+          </a:xfrm>
+          <a:prstGeom prst="rect">
+            <a:avLst/>
+          </a:prstGeom>
+        </p:spPr>
+        <p:style>
+          <a:lnRef idx="2">
+            <a:schemeClr val="accent1">
+              <a:shade val="15000"/>
+            </a:schemeClr>
+          </a:lnRef>
+          <a:fillRef idx="1">
+            <a:schemeClr val="accent1"/>
+          </a:fillRef>
+          <a:effectRef idx="0">
+            <a:schemeClr val="accent1"/>
+          </a:effectRef>
+          <a:fontRef idx="minor">
+            <a:schemeClr val="lt1"/>
+          </a:fontRef>
+        </p:style>
+        <p:txBody>
+          <a:bodyPr rtlCol="0" anchor="ctr"/>
+          <a:lstStyle/>
+          <a:p>
+            <a:pPr algn="ctr"/>
+            <a:r>
+              <a:rPr kumimoji="1" lang="ja-JP" altLang="en-US" dirty="0"/>
+              <a:t>写真</a:t>
+            </a:r>
+          </a:p>
+        </p:txBody>
+      </p:sp>
     </p:spTree>
     <p:extLst>
       <p:ext uri="{BB962C8B-B14F-4D97-AF65-F5344CB8AC3E}">
-        <p14:creationId xmlns:p14="http://schemas.microsoft.com/office/powerpoint/2010/main" val="2433245664"/>
+        <p14:creationId xmlns:p14="http://schemas.microsoft.com/office/powerpoint/2010/main" val="976689875"/>
       </p:ext>
     </p:extLst>
   </p:cSld>
@@ -4696,10 +4905,387 @@
           <a:chExt cx="0" cy="0"/>
         </a:xfrm>
       </p:grpSpPr>
+      <p:sp>
+        <p:nvSpPr>
+          <p:cNvPr id="7" name="テキスト ボックス 6">
+            <a:extLst>
+              <a:ext uri="{FF2B5EF4-FFF2-40B4-BE49-F238E27FC236}">
+                <a16:creationId xmlns:a16="http://schemas.microsoft.com/office/drawing/2014/main" id="{CCC98E16-5F13-0DA0-1425-125583AD472E}"/>
+              </a:ext>
+            </a:extLst>
+          </p:cNvPr>
+          <p:cNvSpPr txBox="1"/>
+          <p:nvPr/>
+        </p:nvSpPr>
+        <p:spPr>
+          <a:xfrm>
+            <a:off x="0" y="275092"/>
+            <a:ext cx="12192000" cy="707886"/>
+          </a:xfrm>
+          <a:prstGeom prst="rect">
+            <a:avLst/>
+          </a:prstGeom>
+          <a:solidFill>
+            <a:srgbClr val="00B050"/>
+          </a:solidFill>
+        </p:spPr>
+        <p:txBody>
+          <a:bodyPr wrap="square" rtlCol="0">
+            <a:spAutoFit/>
+          </a:bodyPr>
+          <a:lstStyle/>
+          <a:p>
+            <a:r>
+              <a:rPr lang="en-US" altLang="ja-JP" sz="4000" dirty="0"/>
+              <a:t> </a:t>
+            </a:r>
+            <a:r>
+              <a:rPr lang="ja-JP" altLang="ja-JP" sz="4000" dirty="0"/>
+              <a:t>テーマ②</a:t>
+            </a:r>
+            <a:r>
+              <a:rPr lang="ja-JP" altLang="en-US" sz="4000" dirty="0"/>
+              <a:t>：</a:t>
+            </a:r>
+            <a:r>
+              <a:rPr lang="ja-JP" altLang="ja-JP" sz="4000" dirty="0"/>
+              <a:t>日田市3D観光マップの制作</a:t>
+            </a:r>
+            <a:endParaRPr lang="ja-JP" altLang="en-US" sz="4000" dirty="0"/>
+          </a:p>
+        </p:txBody>
+      </p:sp>
+      <p:sp>
+        <p:nvSpPr>
+          <p:cNvPr id="8" name="テキスト ボックス 7">
+            <a:extLst>
+              <a:ext uri="{FF2B5EF4-FFF2-40B4-BE49-F238E27FC236}">
+                <a16:creationId xmlns:a16="http://schemas.microsoft.com/office/drawing/2014/main" id="{C852921C-AD2C-6772-24AC-D976DE93A5F2}"/>
+              </a:ext>
+            </a:extLst>
+          </p:cNvPr>
+          <p:cNvSpPr txBox="1"/>
+          <p:nvPr/>
+        </p:nvSpPr>
+        <p:spPr>
+          <a:xfrm>
+            <a:off x="373984" y="3179428"/>
+            <a:ext cx="1210588" cy="707886"/>
+          </a:xfrm>
+          <a:prstGeom prst="rect">
+            <a:avLst/>
+          </a:prstGeom>
+          <a:noFill/>
+        </p:spPr>
+        <p:txBody>
+          <a:bodyPr wrap="none" rtlCol="0">
+            <a:spAutoFit/>
+          </a:bodyPr>
+          <a:lstStyle/>
+          <a:p>
+            <a:r>
+              <a:rPr lang="ja-JP" altLang="en-US" sz="4000" dirty="0"/>
+              <a:t>背景</a:t>
+            </a:r>
+            <a:endParaRPr kumimoji="1" lang="ja-JP" altLang="en-US" sz="4000" dirty="0"/>
+          </a:p>
+        </p:txBody>
+      </p:sp>
+      <p:sp>
+        <p:nvSpPr>
+          <p:cNvPr id="9" name="テキスト ボックス 8">
+            <a:extLst>
+              <a:ext uri="{FF2B5EF4-FFF2-40B4-BE49-F238E27FC236}">
+                <a16:creationId xmlns:a16="http://schemas.microsoft.com/office/drawing/2014/main" id="{EEF6E7DC-850B-0DC5-FB21-055494602BFC}"/>
+              </a:ext>
+            </a:extLst>
+          </p:cNvPr>
+          <p:cNvSpPr txBox="1"/>
+          <p:nvPr/>
+        </p:nvSpPr>
+        <p:spPr>
+          <a:xfrm>
+            <a:off x="373984" y="1632521"/>
+            <a:ext cx="1210588" cy="707886"/>
+          </a:xfrm>
+          <a:prstGeom prst="rect">
+            <a:avLst/>
+          </a:prstGeom>
+          <a:noFill/>
+        </p:spPr>
+        <p:txBody>
+          <a:bodyPr wrap="none" rtlCol="0">
+            <a:spAutoFit/>
+          </a:bodyPr>
+          <a:lstStyle/>
+          <a:p>
+            <a:r>
+              <a:rPr lang="ja-JP" altLang="en-US" sz="4000" dirty="0"/>
+              <a:t>目的</a:t>
+            </a:r>
+            <a:endParaRPr kumimoji="1" lang="ja-JP" altLang="en-US" sz="4000" dirty="0"/>
+          </a:p>
+        </p:txBody>
+      </p:sp>
+      <p:sp>
+        <p:nvSpPr>
+          <p:cNvPr id="10" name="テキスト ボックス 9">
+            <a:extLst>
+              <a:ext uri="{FF2B5EF4-FFF2-40B4-BE49-F238E27FC236}">
+                <a16:creationId xmlns:a16="http://schemas.microsoft.com/office/drawing/2014/main" id="{335AA4BA-D50D-A2A1-3CD2-C00382F7C42B}"/>
+              </a:ext>
+            </a:extLst>
+          </p:cNvPr>
+          <p:cNvSpPr txBox="1"/>
+          <p:nvPr/>
+        </p:nvSpPr>
+        <p:spPr>
+          <a:xfrm>
+            <a:off x="373984" y="4726336"/>
+            <a:ext cx="1210588" cy="707886"/>
+          </a:xfrm>
+          <a:prstGeom prst="rect">
+            <a:avLst/>
+          </a:prstGeom>
+          <a:noFill/>
+        </p:spPr>
+        <p:txBody>
+          <a:bodyPr wrap="none" rtlCol="0">
+            <a:spAutoFit/>
+          </a:bodyPr>
+          <a:lstStyle/>
+          <a:p>
+            <a:r>
+              <a:rPr lang="ja-JP" altLang="en-US" sz="4000" dirty="0"/>
+              <a:t>概要</a:t>
+            </a:r>
+            <a:endParaRPr kumimoji="1" lang="ja-JP" altLang="en-US" sz="4000" dirty="0"/>
+          </a:p>
+        </p:txBody>
+      </p:sp>
+      <p:sp>
+        <p:nvSpPr>
+          <p:cNvPr id="11" name="テキスト ボックス 10">
+            <a:extLst>
+              <a:ext uri="{FF2B5EF4-FFF2-40B4-BE49-F238E27FC236}">
+                <a16:creationId xmlns:a16="http://schemas.microsoft.com/office/drawing/2014/main" id="{1C0353BC-833C-2DCB-D40A-4A62CDBC6EA7}"/>
+              </a:ext>
+            </a:extLst>
+          </p:cNvPr>
+          <p:cNvSpPr txBox="1"/>
+          <p:nvPr/>
+        </p:nvSpPr>
+        <p:spPr>
+          <a:xfrm>
+            <a:off x="6493933" y="1632521"/>
+            <a:ext cx="5314275" cy="1323439"/>
+          </a:xfrm>
+          <a:prstGeom prst="rect">
+            <a:avLst/>
+          </a:prstGeom>
+          <a:noFill/>
+        </p:spPr>
+        <p:txBody>
+          <a:bodyPr wrap="none" rtlCol="0">
+            <a:spAutoFit/>
+          </a:bodyPr>
+          <a:lstStyle/>
+          <a:p>
+            <a:r>
+              <a:rPr lang="ja-JP" altLang="ja-JP" sz="4000" dirty="0"/>
+              <a:t>3Dマップの完成</a:t>
+            </a:r>
+            <a:endParaRPr lang="en-US" altLang="ja-JP" sz="4000" dirty="0"/>
+          </a:p>
+          <a:p>
+            <a:r>
+              <a:rPr lang="ja-JP" altLang="en-US" sz="4000" dirty="0"/>
+              <a:t>　　　　　　</a:t>
+            </a:r>
+            <a:r>
+              <a:rPr lang="ja-JP" altLang="ja-JP" sz="4000" dirty="0"/>
+              <a:t>イメージ</a:t>
+            </a:r>
+            <a:endParaRPr lang="en-US" altLang="ja-JP" sz="4000" dirty="0"/>
+          </a:p>
+        </p:txBody>
+      </p:sp>
+      <p:sp>
+        <p:nvSpPr>
+          <p:cNvPr id="12" name="テキスト ボックス 11">
+            <a:extLst>
+              <a:ext uri="{FF2B5EF4-FFF2-40B4-BE49-F238E27FC236}">
+                <a16:creationId xmlns:a16="http://schemas.microsoft.com/office/drawing/2014/main" id="{0D0BFB82-D13B-1FC7-5611-C10829CA8C74}"/>
+              </a:ext>
+            </a:extLst>
+          </p:cNvPr>
+          <p:cNvSpPr txBox="1"/>
+          <p:nvPr/>
+        </p:nvSpPr>
+        <p:spPr>
+          <a:xfrm>
+            <a:off x="373984" y="2436752"/>
+            <a:ext cx="5562741" cy="646331"/>
+          </a:xfrm>
+          <a:prstGeom prst="rect">
+            <a:avLst/>
+          </a:prstGeom>
+          <a:noFill/>
+        </p:spPr>
+        <p:txBody>
+          <a:bodyPr wrap="none" rtlCol="0">
+            <a:spAutoFit/>
+          </a:bodyPr>
+          <a:lstStyle/>
+          <a:p>
+            <a:r>
+              <a:rPr lang="ja-JP" altLang="ja-JP" dirty="0"/>
+              <a:t>3D観光マップを制作し、観光地の位置関係を分かり</a:t>
+            </a:r>
+            <a:endParaRPr lang="en-US" altLang="ja-JP" dirty="0"/>
+          </a:p>
+          <a:p>
+            <a:r>
+              <a:rPr lang="ja-JP" altLang="ja-JP" dirty="0"/>
+              <a:t>やすく伝え、観光ルートの検討を支援する。</a:t>
+            </a:r>
+            <a:endParaRPr lang="en-US" altLang="ja-JP" dirty="0"/>
+          </a:p>
+        </p:txBody>
+      </p:sp>
+      <p:sp>
+        <p:nvSpPr>
+          <p:cNvPr id="13" name="テキスト ボックス 12">
+            <a:extLst>
+              <a:ext uri="{FF2B5EF4-FFF2-40B4-BE49-F238E27FC236}">
+                <a16:creationId xmlns:a16="http://schemas.microsoft.com/office/drawing/2014/main" id="{DE2C3D34-4593-CEAA-0C72-02A5DE70DE78}"/>
+              </a:ext>
+            </a:extLst>
+          </p:cNvPr>
+          <p:cNvSpPr txBox="1"/>
+          <p:nvPr/>
+        </p:nvSpPr>
+        <p:spPr>
+          <a:xfrm>
+            <a:off x="373984" y="3983659"/>
+            <a:ext cx="5562741" cy="646331"/>
+          </a:xfrm>
+          <a:prstGeom prst="rect">
+            <a:avLst/>
+          </a:prstGeom>
+          <a:noFill/>
+        </p:spPr>
+        <p:txBody>
+          <a:bodyPr wrap="none" rtlCol="0">
+            <a:spAutoFit/>
+          </a:bodyPr>
+          <a:lstStyle/>
+          <a:p>
+            <a:r>
+              <a:rPr lang="ja-JP" altLang="ja-JP" dirty="0"/>
+              <a:t>従来の地図では伝わりにくい位置関係を、</a:t>
+            </a:r>
+            <a:r>
+              <a:rPr lang="en-US" altLang="ja-JP" dirty="0"/>
+              <a:t>3D</a:t>
+            </a:r>
+            <a:r>
+              <a:rPr lang="ja-JP" altLang="ja-JP" dirty="0"/>
+              <a:t>技術を</a:t>
+            </a:r>
+            <a:endParaRPr lang="en-US" altLang="ja-JP" dirty="0"/>
+          </a:p>
+          <a:p>
+            <a:r>
+              <a:rPr lang="ja-JP" altLang="ja-JP" dirty="0"/>
+              <a:t>使って分かりやすく伝えたい。</a:t>
+            </a:r>
+          </a:p>
+        </p:txBody>
+      </p:sp>
+      <p:sp>
+        <p:nvSpPr>
+          <p:cNvPr id="14" name="テキスト ボックス 13">
+            <a:extLst>
+              <a:ext uri="{FF2B5EF4-FFF2-40B4-BE49-F238E27FC236}">
+                <a16:creationId xmlns:a16="http://schemas.microsoft.com/office/drawing/2014/main" id="{02248BEF-2F20-0A4B-250B-6C9E4B250B9B}"/>
+              </a:ext>
+            </a:extLst>
+          </p:cNvPr>
+          <p:cNvSpPr txBox="1"/>
+          <p:nvPr/>
+        </p:nvSpPr>
+        <p:spPr>
+          <a:xfrm>
+            <a:off x="373984" y="5528734"/>
+            <a:ext cx="5509842" cy="646331"/>
+          </a:xfrm>
+          <a:prstGeom prst="rect">
+            <a:avLst/>
+          </a:prstGeom>
+          <a:noFill/>
+        </p:spPr>
+        <p:txBody>
+          <a:bodyPr wrap="none" rtlCol="0">
+            <a:spAutoFit/>
+          </a:bodyPr>
+          <a:lstStyle/>
+          <a:p>
+            <a:r>
+              <a:rPr lang="ja-JP" altLang="ja-JP" dirty="0"/>
+              <a:t>3Dマップを操作しながら観光スポットを確認し、</a:t>
+            </a:r>
+            <a:endParaRPr lang="en-US" altLang="ja-JP" dirty="0"/>
+          </a:p>
+          <a:p>
+            <a:r>
+              <a:rPr lang="ja-JP" altLang="ja-JP" dirty="0"/>
+              <a:t>紹介サイトへ遷移できるWebコンテンツを目指す。</a:t>
+            </a:r>
+            <a:endParaRPr lang="ja-JP" altLang="en-US" dirty="0"/>
+          </a:p>
+        </p:txBody>
+      </p:sp>
+      <p:pic>
+        <p:nvPicPr>
+          <p:cNvPr id="17" name="図 16">
+            <a:extLst>
+              <a:ext uri="{FF2B5EF4-FFF2-40B4-BE49-F238E27FC236}">
+                <a16:creationId xmlns:a16="http://schemas.microsoft.com/office/drawing/2014/main" id="{B83CF779-725A-E42E-82D3-A2CB584357CD}"/>
+              </a:ext>
+            </a:extLst>
+          </p:cNvPr>
+          <p:cNvPicPr>
+            <a:picLocks noChangeAspect="1"/>
+          </p:cNvPicPr>
+          <p:nvPr/>
+        </p:nvPicPr>
+        <p:blipFill>
+          <a:blip r:embed="rId2">
+            <a:extLst>
+              <a:ext uri="{28A0092B-C50C-407E-A947-70E740481C1C}">
+                <a14:useLocalDpi xmlns:a14="http://schemas.microsoft.com/office/drawing/2010/main" val="0"/>
+              </a:ext>
+            </a:extLst>
+          </a:blip>
+          <a:stretch>
+            <a:fillRect/>
+          </a:stretch>
+        </p:blipFill>
+        <p:spPr>
+          <a:xfrm>
+            <a:off x="6629223" y="2955960"/>
+            <a:ext cx="5324083" cy="3843988"/>
+          </a:xfrm>
+          <a:prstGeom prst="rect">
+            <a:avLst/>
+          </a:prstGeom>
+        </p:spPr>
+      </p:pic>
     </p:spTree>
     <p:extLst>
       <p:ext uri="{BB962C8B-B14F-4D97-AF65-F5344CB8AC3E}">
-        <p14:creationId xmlns:p14="http://schemas.microsoft.com/office/powerpoint/2010/main" val="976689875"/>
+        <p14:creationId xmlns:p14="http://schemas.microsoft.com/office/powerpoint/2010/main" val="2433245664"/>
       </p:ext>
     </p:extLst>
   </p:cSld>

--- a/中間発表.pptx
+++ b/中間発表.pptx
@@ -7,8 +7,9 @@
   <p:sldIdLst>
     <p:sldId id="256" r:id="rId2"/>
     <p:sldId id="257" r:id="rId3"/>
-    <p:sldId id="259" r:id="rId4"/>
-    <p:sldId id="258" r:id="rId5"/>
+    <p:sldId id="260" r:id="rId4"/>
+    <p:sldId id="259" r:id="rId5"/>
+    <p:sldId id="258" r:id="rId6"/>
   </p:sldIdLst>
   <p:sldSz cx="12192000" cy="6858000"/>
   <p:notesSz cx="6858000" cy="9144000"/>
@@ -4289,6 +4290,96 @@
           <a:chExt cx="0" cy="0"/>
         </a:xfrm>
       </p:grpSpPr>
+      <p:pic>
+        <p:nvPicPr>
+          <p:cNvPr id="3" name="図 2">
+            <a:extLst>
+              <a:ext uri="{FF2B5EF4-FFF2-40B4-BE49-F238E27FC236}">
+                <a16:creationId xmlns:a16="http://schemas.microsoft.com/office/drawing/2014/main" id="{33C4DECD-7593-6409-77EC-D6A8547DF26C}"/>
+              </a:ext>
+            </a:extLst>
+          </p:cNvPr>
+          <p:cNvPicPr>
+            <a:picLocks noChangeAspect="1"/>
+          </p:cNvPicPr>
+          <p:nvPr/>
+        </p:nvPicPr>
+        <p:blipFill>
+          <a:blip r:embed="rId2"/>
+          <a:stretch>
+            <a:fillRect/>
+          </a:stretch>
+        </p:blipFill>
+        <p:spPr>
+          <a:xfrm>
+            <a:off x="866596" y="875288"/>
+            <a:ext cx="10336067" cy="1228896"/>
+          </a:xfrm>
+          <a:prstGeom prst="rect">
+            <a:avLst/>
+          </a:prstGeom>
+        </p:spPr>
+      </p:pic>
+      <p:pic>
+        <p:nvPicPr>
+          <p:cNvPr id="5" name="図 4">
+            <a:extLst>
+              <a:ext uri="{FF2B5EF4-FFF2-40B4-BE49-F238E27FC236}">
+                <a16:creationId xmlns:a16="http://schemas.microsoft.com/office/drawing/2014/main" id="{53017111-2945-A591-DF17-EA68413BC7DA}"/>
+              </a:ext>
+            </a:extLst>
+          </p:cNvPr>
+          <p:cNvPicPr>
+            <a:picLocks noChangeAspect="1"/>
+          </p:cNvPicPr>
+          <p:nvPr/>
+        </p:nvPicPr>
+        <p:blipFill>
+          <a:blip r:embed="rId3"/>
+          <a:stretch>
+            <a:fillRect/>
+          </a:stretch>
+        </p:blipFill>
+        <p:spPr>
+          <a:xfrm>
+            <a:off x="939898" y="2565486"/>
+            <a:ext cx="10802858" cy="1533739"/>
+          </a:xfrm>
+          <a:prstGeom prst="rect">
+            <a:avLst/>
+          </a:prstGeom>
+        </p:spPr>
+      </p:pic>
+    </p:spTree>
+    <p:extLst>
+      <p:ext uri="{BB962C8B-B14F-4D97-AF65-F5344CB8AC3E}">
+        <p14:creationId xmlns:p14="http://schemas.microsoft.com/office/powerpoint/2010/main" val="4230027651"/>
+      </p:ext>
+    </p:extLst>
+  </p:cSld>
+  <p:clrMapOvr>
+    <a:masterClrMapping/>
+  </p:clrMapOvr>
+</p:sld>
+</file>
+
+<file path=ppt/slides/slide4.xml><?xml version="1.0" encoding="utf-8"?>
+<p:sld xmlns:a="http://schemas.openxmlformats.org/drawingml/2006/main" xmlns:r="http://schemas.openxmlformats.org/officeDocument/2006/relationships" xmlns:p="http://schemas.openxmlformats.org/presentationml/2006/main">
+  <p:cSld>
+    <p:spTree>
+      <p:nvGrpSpPr>
+        <p:cNvPr id="1" name=""/>
+        <p:cNvGrpSpPr/>
+        <p:nvPr/>
+      </p:nvGrpSpPr>
+      <p:grpSpPr>
+        <a:xfrm>
+          <a:off x="0" y="0"/>
+          <a:ext cx="0" cy="0"/>
+          <a:chOff x="0" y="0"/>
+          <a:chExt cx="0" cy="0"/>
+        </a:xfrm>
+      </p:grpSpPr>
       <p:sp>
         <p:nvSpPr>
           <p:cNvPr id="2" name="正方形/長方形 1">
@@ -4888,7 +4979,7 @@
 </p:sld>
 </file>
 
-<file path=ppt/slides/slide4.xml><?xml version="1.0" encoding="utf-8"?>
+<file path=ppt/slides/slide5.xml><?xml version="1.0" encoding="utf-8"?>
 <p:sld xmlns:a="http://schemas.openxmlformats.org/drawingml/2006/main" xmlns:r="http://schemas.openxmlformats.org/officeDocument/2006/relationships" xmlns:p="http://schemas.openxmlformats.org/presentationml/2006/main">
   <p:cSld>
     <p:spTree>

--- a/中間発表.pptx
+++ b/中間発表.pptx
@@ -10,6 +10,9 @@
     <p:sldId id="260" r:id="rId4"/>
     <p:sldId id="259" r:id="rId5"/>
     <p:sldId id="258" r:id="rId6"/>
+    <p:sldId id="261" r:id="rId7"/>
+    <p:sldId id="262" r:id="rId8"/>
+    <p:sldId id="263" r:id="rId9"/>
   </p:sldIdLst>
   <p:sldSz cx="12192000" cy="6858000"/>
   <p:notesSz cx="6858000" cy="9144000"/>
@@ -263,7 +266,7 @@
           <a:p>
             <a:fld id="{BEDAAAC8-8BD8-4163-897B-A036D3BDFBA3}" type="datetimeFigureOut">
               <a:rPr kumimoji="1" lang="ja-JP" altLang="en-US" smtClean="0"/>
-              <a:t>2026/7/3</a:t>
+              <a:t>2026/7/5</a:t>
             </a:fld>
             <a:endParaRPr kumimoji="1" lang="ja-JP" altLang="en-US"/>
           </a:p>
@@ -493,7 +496,7 @@
           <a:p>
             <a:fld id="{BEDAAAC8-8BD8-4163-897B-A036D3BDFBA3}" type="datetimeFigureOut">
               <a:rPr kumimoji="1" lang="ja-JP" altLang="en-US" smtClean="0"/>
-              <a:t>2026/7/3</a:t>
+              <a:t>2026/7/5</a:t>
             </a:fld>
             <a:endParaRPr kumimoji="1" lang="ja-JP" altLang="en-US"/>
           </a:p>
@@ -733,7 +736,7 @@
           <a:p>
             <a:fld id="{BEDAAAC8-8BD8-4163-897B-A036D3BDFBA3}" type="datetimeFigureOut">
               <a:rPr kumimoji="1" lang="ja-JP" altLang="en-US" smtClean="0"/>
-              <a:t>2026/7/3</a:t>
+              <a:t>2026/7/5</a:t>
             </a:fld>
             <a:endParaRPr kumimoji="1" lang="ja-JP" altLang="en-US"/>
           </a:p>
@@ -963,7 +966,7 @@
           <a:p>
             <a:fld id="{BEDAAAC8-8BD8-4163-897B-A036D3BDFBA3}" type="datetimeFigureOut">
               <a:rPr kumimoji="1" lang="ja-JP" altLang="en-US" smtClean="0"/>
-              <a:t>2026/7/3</a:t>
+              <a:t>2026/7/5</a:t>
             </a:fld>
             <a:endParaRPr kumimoji="1" lang="ja-JP" altLang="en-US"/>
           </a:p>
@@ -1238,7 +1241,7 @@
           <a:p>
             <a:fld id="{BEDAAAC8-8BD8-4163-897B-A036D3BDFBA3}" type="datetimeFigureOut">
               <a:rPr kumimoji="1" lang="ja-JP" altLang="en-US" smtClean="0"/>
-              <a:t>2026/7/3</a:t>
+              <a:t>2026/7/5</a:t>
             </a:fld>
             <a:endParaRPr kumimoji="1" lang="ja-JP" altLang="en-US"/>
           </a:p>
@@ -1567,7 +1570,7 @@
           <a:p>
             <a:fld id="{BEDAAAC8-8BD8-4163-897B-A036D3BDFBA3}" type="datetimeFigureOut">
               <a:rPr kumimoji="1" lang="ja-JP" altLang="en-US" smtClean="0"/>
-              <a:t>2026/7/3</a:t>
+              <a:t>2026/7/5</a:t>
             </a:fld>
             <a:endParaRPr kumimoji="1" lang="ja-JP" altLang="en-US"/>
           </a:p>
@@ -2043,7 +2046,7 @@
           <a:p>
             <a:fld id="{BEDAAAC8-8BD8-4163-897B-A036D3BDFBA3}" type="datetimeFigureOut">
               <a:rPr kumimoji="1" lang="ja-JP" altLang="en-US" smtClean="0"/>
-              <a:t>2026/7/3</a:t>
+              <a:t>2026/7/5</a:t>
             </a:fld>
             <a:endParaRPr kumimoji="1" lang="ja-JP" altLang="en-US"/>
           </a:p>
@@ -2184,7 +2187,7 @@
           <a:p>
             <a:fld id="{BEDAAAC8-8BD8-4163-897B-A036D3BDFBA3}" type="datetimeFigureOut">
               <a:rPr kumimoji="1" lang="ja-JP" altLang="en-US" smtClean="0"/>
-              <a:t>2026/7/3</a:t>
+              <a:t>2026/7/5</a:t>
             </a:fld>
             <a:endParaRPr kumimoji="1" lang="ja-JP" altLang="en-US"/>
           </a:p>
@@ -2297,7 +2300,7 @@
           <a:p>
             <a:fld id="{BEDAAAC8-8BD8-4163-897B-A036D3BDFBA3}" type="datetimeFigureOut">
               <a:rPr kumimoji="1" lang="ja-JP" altLang="en-US" smtClean="0"/>
-              <a:t>2026/7/3</a:t>
+              <a:t>2026/7/5</a:t>
             </a:fld>
             <a:endParaRPr kumimoji="1" lang="ja-JP" altLang="en-US"/>
           </a:p>
@@ -2640,7 +2643,7 @@
           <a:p>
             <a:fld id="{BEDAAAC8-8BD8-4163-897B-A036D3BDFBA3}" type="datetimeFigureOut">
               <a:rPr kumimoji="1" lang="ja-JP" altLang="en-US" smtClean="0"/>
-              <a:t>2026/7/3</a:t>
+              <a:t>2026/7/5</a:t>
             </a:fld>
             <a:endParaRPr kumimoji="1" lang="ja-JP" altLang="en-US"/>
           </a:p>
@@ -2928,7 +2931,7 @@
           <a:p>
             <a:fld id="{BEDAAAC8-8BD8-4163-897B-A036D3BDFBA3}" type="datetimeFigureOut">
               <a:rPr kumimoji="1" lang="ja-JP" altLang="en-US" smtClean="0"/>
-              <a:t>2026/7/3</a:t>
+              <a:t>2026/7/5</a:t>
             </a:fld>
             <a:endParaRPr kumimoji="1" lang="ja-JP" altLang="en-US"/>
           </a:p>
@@ -3201,7 +3204,7 @@
           <a:p>
             <a:fld id="{BEDAAAC8-8BD8-4163-897B-A036D3BDFBA3}" type="datetimeFigureOut">
               <a:rPr kumimoji="1" lang="ja-JP" altLang="en-US" smtClean="0"/>
-              <a:t>2026/7/3</a:t>
+              <a:t>2026/7/5</a:t>
             </a:fld>
             <a:endParaRPr kumimoji="1" lang="ja-JP" altLang="en-US"/>
           </a:p>
@@ -3669,8 +3672,8 @@
         </p:nvSpPr>
         <p:spPr>
           <a:xfrm>
-            <a:off x="348269" y="1935815"/>
-            <a:ext cx="4698722" cy="1077218"/>
+            <a:off x="338725" y="1966592"/>
+            <a:ext cx="4416594" cy="1015663"/>
           </a:xfrm>
           <a:prstGeom prst="rect">
             <a:avLst/>
@@ -3684,14 +3687,14 @@
           <a:lstStyle/>
           <a:p>
             <a:r>
-              <a:rPr lang="ja-JP" altLang="ja-JP" sz="3200" dirty="0">
+              <a:rPr lang="ja-JP" altLang="ja-JP" sz="3000" dirty="0">
                 <a:solidFill>
                   <a:srgbClr val="0070C0"/>
                 </a:solidFill>
               </a:rPr>
               <a:t>テーマ①</a:t>
             </a:r>
-            <a:endParaRPr lang="en-US" altLang="ja-JP" sz="3200" dirty="0">
+            <a:endParaRPr lang="en-US" altLang="ja-JP" sz="3000" dirty="0">
               <a:solidFill>
                 <a:srgbClr val="0070C0"/>
               </a:solidFill>
@@ -3699,10 +3702,10 @@
           </a:p>
           <a:p>
             <a:r>
-              <a:rPr lang="ja-JP" altLang="ja-JP" sz="3200" dirty="0"/>
+              <a:rPr lang="ja-JP" altLang="ja-JP" sz="3000" dirty="0"/>
               <a:t>日田市紹介サイトの制作</a:t>
             </a:r>
-            <a:endParaRPr kumimoji="1" lang="ja-JP" altLang="en-US" sz="3200" dirty="0"/>
+            <a:endParaRPr kumimoji="1" lang="ja-JP" altLang="en-US" sz="3000" dirty="0"/>
           </a:p>
         </p:txBody>
       </p:sp>
@@ -3771,7 +3774,7 @@
         </p:nvSpPr>
         <p:spPr>
           <a:xfrm>
-            <a:off x="335581" y="4796614"/>
+            <a:off x="348269" y="6301431"/>
             <a:ext cx="1980029" cy="400110"/>
           </a:xfrm>
           <a:prstGeom prst="rect">
@@ -3843,7 +3846,7 @@
         </p:nvSpPr>
         <p:spPr>
           <a:xfrm>
-            <a:off x="335581" y="5196724"/>
+            <a:off x="2436503" y="6301431"/>
             <a:ext cx="2180405" cy="400110"/>
           </a:xfrm>
           <a:prstGeom prst="rect">
@@ -3866,6 +3869,47 @@
               <a:t>25098</a:t>
             </a:r>
             <a:endParaRPr kumimoji="1" lang="ja-JP" altLang="en-US" sz="2000" dirty="0"/>
+          </a:p>
+        </p:txBody>
+      </p:sp>
+      <p:sp>
+        <p:nvSpPr>
+          <p:cNvPr id="2" name="テキスト ボックス 1">
+            <a:extLst>
+              <a:ext uri="{FF2B5EF4-FFF2-40B4-BE49-F238E27FC236}">
+                <a16:creationId xmlns:a16="http://schemas.microsoft.com/office/drawing/2014/main" id="{5E8E59B1-948B-C223-6FD8-C9BA5BF0A6AC}"/>
+              </a:ext>
+            </a:extLst>
+          </p:cNvPr>
+          <p:cNvSpPr txBox="1"/>
+          <p:nvPr/>
+        </p:nvSpPr>
+        <p:spPr>
+          <a:xfrm>
+            <a:off x="348269" y="4871031"/>
+            <a:ext cx="4801314" cy="1015663"/>
+          </a:xfrm>
+          <a:prstGeom prst="rect">
+            <a:avLst/>
+          </a:prstGeom>
+          <a:noFill/>
+        </p:spPr>
+        <p:txBody>
+          <a:bodyPr wrap="none" rtlCol="0">
+            <a:spAutoFit/>
+          </a:bodyPr>
+          <a:lstStyle/>
+          <a:p>
+            <a:r>
+              <a:rPr lang="ja-JP" altLang="ja-JP" sz="3000" dirty="0"/>
+              <a:t>チラシの作成</a:t>
+            </a:r>
+          </a:p>
+          <a:p>
+            <a:r>
+              <a:rPr lang="ja-JP" altLang="ja-JP" sz="3000" dirty="0"/>
+              <a:t>日田市紹介サイトのチラシ</a:t>
+            </a:r>
           </a:p>
         </p:txBody>
       </p:sp>
@@ -4290,66 +4334,450 @@
           <a:chExt cx="0" cy="0"/>
         </a:xfrm>
       </p:grpSpPr>
-      <p:pic>
-        <p:nvPicPr>
-          <p:cNvPr id="3" name="図 2">
-            <a:extLst>
-              <a:ext uri="{FF2B5EF4-FFF2-40B4-BE49-F238E27FC236}">
-                <a16:creationId xmlns:a16="http://schemas.microsoft.com/office/drawing/2014/main" id="{33C4DECD-7593-6409-77EC-D6A8547DF26C}"/>
-              </a:ext>
-            </a:extLst>
-          </p:cNvPr>
-          <p:cNvPicPr>
-            <a:picLocks noChangeAspect="1"/>
-          </p:cNvPicPr>
+      <p:sp>
+        <p:nvSpPr>
+          <p:cNvPr id="2" name="テキスト ボックス 1">
+            <a:extLst>
+              <a:ext uri="{FF2B5EF4-FFF2-40B4-BE49-F238E27FC236}">
+                <a16:creationId xmlns:a16="http://schemas.microsoft.com/office/drawing/2014/main" id="{E4E24ACD-C886-36E2-79FF-8FBA18EA1B7E}"/>
+              </a:ext>
+            </a:extLst>
+          </p:cNvPr>
+          <p:cNvSpPr txBox="1"/>
           <p:nvPr/>
-        </p:nvPicPr>
-        <p:blipFill>
-          <a:blip r:embed="rId2"/>
-          <a:stretch>
-            <a:fillRect/>
-          </a:stretch>
-        </p:blipFill>
-        <p:spPr>
-          <a:xfrm>
-            <a:off x="866596" y="875288"/>
-            <a:ext cx="10336067" cy="1228896"/>
+        </p:nvSpPr>
+        <p:spPr>
+          <a:xfrm>
+            <a:off x="304799" y="4939976"/>
+            <a:ext cx="5109091" cy="1754326"/>
           </a:xfrm>
           <a:prstGeom prst="rect">
             <a:avLst/>
           </a:prstGeom>
-        </p:spPr>
-      </p:pic>
-      <p:pic>
-        <p:nvPicPr>
-          <p:cNvPr id="5" name="図 4">
-            <a:extLst>
-              <a:ext uri="{FF2B5EF4-FFF2-40B4-BE49-F238E27FC236}">
-                <a16:creationId xmlns:a16="http://schemas.microsoft.com/office/drawing/2014/main" id="{53017111-2945-A591-DF17-EA68413BC7DA}"/>
-              </a:ext>
-            </a:extLst>
-          </p:cNvPr>
-          <p:cNvPicPr>
-            <a:picLocks noChangeAspect="1"/>
-          </p:cNvPicPr>
+          <a:noFill/>
+        </p:spPr>
+        <p:txBody>
+          <a:bodyPr wrap="none" rtlCol="0">
+            <a:spAutoFit/>
+          </a:bodyPr>
+          <a:lstStyle/>
+          <a:p>
+            <a:r>
+              <a:rPr lang="ja-JP" altLang="ja-JP" b="1" dirty="0"/>
+              <a:t>ページ３</a:t>
+            </a:r>
+            <a:endParaRPr lang="ja-JP" altLang="ja-JP" dirty="0"/>
+          </a:p>
+          <a:p>
+            <a:r>
+              <a:rPr lang="ja-JP" altLang="ja-JP" dirty="0"/>
+              <a:t>観光スポット：日田市の代表的な</a:t>
+            </a:r>
+            <a:endParaRPr lang="en-US" altLang="ja-JP" dirty="0"/>
+          </a:p>
+          <a:p>
+            <a:r>
+              <a:rPr lang="ja-JP" altLang="ja-JP" dirty="0"/>
+              <a:t>観光スポットや見どころを紹介する。</a:t>
+            </a:r>
+          </a:p>
+          <a:p>
+            <a:r>
+              <a:rPr lang="ja-JP" altLang="ja-JP" dirty="0"/>
+              <a:t>紹介する観光スポット：8～10か所</a:t>
+            </a:r>
+          </a:p>
+          <a:p>
+            <a:r>
+              <a:rPr lang="ja-JP" altLang="ja-JP" dirty="0"/>
+              <a:t>写真：各スポット1～2枚（合計10～15枚程度）</a:t>
+            </a:r>
+          </a:p>
+          <a:p>
+            <a:r>
+              <a:rPr lang="ja-JP" altLang="ja-JP" dirty="0"/>
+              <a:t>文章量：各スポット約100～150文字</a:t>
+            </a:r>
+          </a:p>
+        </p:txBody>
+      </p:sp>
+      <p:sp>
+        <p:nvSpPr>
+          <p:cNvPr id="4" name="テキスト ボックス 3">
+            <a:extLst>
+              <a:ext uri="{FF2B5EF4-FFF2-40B4-BE49-F238E27FC236}">
+                <a16:creationId xmlns:a16="http://schemas.microsoft.com/office/drawing/2014/main" id="{1E062912-81C0-3927-0905-AD01C7957C0B}"/>
+              </a:ext>
+            </a:extLst>
+          </p:cNvPr>
+          <p:cNvSpPr txBox="1"/>
           <p:nvPr/>
-        </p:nvPicPr>
-        <p:blipFill>
-          <a:blip r:embed="rId3"/>
-          <a:stretch>
-            <a:fillRect/>
-          </a:stretch>
-        </p:blipFill>
-        <p:spPr>
-          <a:xfrm>
-            <a:off x="939898" y="2565486"/>
-            <a:ext cx="10802858" cy="1533739"/>
+        </p:nvSpPr>
+        <p:spPr>
+          <a:xfrm>
+            <a:off x="304799" y="2911980"/>
+            <a:ext cx="4801314" cy="1754326"/>
           </a:xfrm>
           <a:prstGeom prst="rect">
             <a:avLst/>
           </a:prstGeom>
-        </p:spPr>
-      </p:pic>
+          <a:noFill/>
+        </p:spPr>
+        <p:txBody>
+          <a:bodyPr wrap="none" rtlCol="0">
+            <a:spAutoFit/>
+          </a:bodyPr>
+          <a:lstStyle/>
+          <a:p>
+            <a:r>
+              <a:rPr lang="ja-JP" altLang="ja-JP" b="1" dirty="0"/>
+              <a:t>ページ２</a:t>
+            </a:r>
+            <a:endParaRPr lang="ja-JP" altLang="ja-JP" dirty="0"/>
+          </a:p>
+          <a:p>
+            <a:r>
+              <a:rPr lang="ja-JP" altLang="ja-JP" dirty="0"/>
+              <a:t>日田市の基本情報：日田市の位置や歴史、</a:t>
+            </a:r>
+            <a:endParaRPr lang="en-US" altLang="ja-JP" dirty="0"/>
+          </a:p>
+          <a:p>
+            <a:r>
+              <a:rPr lang="ja-JP" altLang="ja-JP" dirty="0"/>
+              <a:t>人口、特産品などの基本情報を紹介する。</a:t>
+            </a:r>
+          </a:p>
+          <a:p>
+            <a:r>
+              <a:rPr lang="ja-JP" altLang="ja-JP" dirty="0"/>
+              <a:t>基本情報（位置・歴史・人口・特産品など）</a:t>
+            </a:r>
+          </a:p>
+          <a:p>
+            <a:r>
+              <a:rPr lang="ja-JP" altLang="ja-JP" dirty="0"/>
+              <a:t>文章量：約500～700文字</a:t>
+            </a:r>
+          </a:p>
+          <a:p>
+            <a:r>
+              <a:rPr lang="ja-JP" altLang="ja-JP" dirty="0"/>
+              <a:t>写真：3～5枚</a:t>
+            </a:r>
+          </a:p>
+        </p:txBody>
+      </p:sp>
+      <p:sp>
+        <p:nvSpPr>
+          <p:cNvPr id="6" name="テキスト ボックス 5">
+            <a:extLst>
+              <a:ext uri="{FF2B5EF4-FFF2-40B4-BE49-F238E27FC236}">
+                <a16:creationId xmlns:a16="http://schemas.microsoft.com/office/drawing/2014/main" id="{25D8E683-B94C-837C-78B7-D591F59A31A1}"/>
+              </a:ext>
+            </a:extLst>
+          </p:cNvPr>
+          <p:cNvSpPr txBox="1"/>
+          <p:nvPr/>
+        </p:nvSpPr>
+        <p:spPr>
+          <a:xfrm>
+            <a:off x="304799" y="1991980"/>
+            <a:ext cx="4570482" cy="646331"/>
+          </a:xfrm>
+          <a:prstGeom prst="rect">
+            <a:avLst/>
+          </a:prstGeom>
+          <a:noFill/>
+        </p:spPr>
+        <p:txBody>
+          <a:bodyPr wrap="none" rtlCol="0">
+            <a:spAutoFit/>
+          </a:bodyPr>
+          <a:lstStyle/>
+          <a:p>
+            <a:r>
+              <a:rPr lang="ja-JP" altLang="ja-JP" b="1" dirty="0"/>
+              <a:t>ページ１</a:t>
+            </a:r>
+            <a:endParaRPr lang="ja-JP" altLang="ja-JP" dirty="0"/>
+          </a:p>
+          <a:p>
+            <a:r>
+              <a:rPr lang="ja-JP" altLang="ja-JP" dirty="0"/>
+              <a:t>トップページ：日田市の魅力を簡単に紹介</a:t>
+            </a:r>
+          </a:p>
+        </p:txBody>
+      </p:sp>
+      <p:sp>
+        <p:nvSpPr>
+          <p:cNvPr id="7" name="テキスト ボックス 6">
+            <a:extLst>
+              <a:ext uri="{FF2B5EF4-FFF2-40B4-BE49-F238E27FC236}">
+                <a16:creationId xmlns:a16="http://schemas.microsoft.com/office/drawing/2014/main" id="{1C5BC3ED-A661-D88A-C860-0935A5BE479C}"/>
+              </a:ext>
+            </a:extLst>
+          </p:cNvPr>
+          <p:cNvSpPr txBox="1"/>
+          <p:nvPr/>
+        </p:nvSpPr>
+        <p:spPr>
+          <a:xfrm>
+            <a:off x="5413891" y="1262505"/>
+            <a:ext cx="6417141" cy="1477328"/>
+          </a:xfrm>
+          <a:prstGeom prst="rect">
+            <a:avLst/>
+          </a:prstGeom>
+          <a:noFill/>
+        </p:spPr>
+        <p:txBody>
+          <a:bodyPr wrap="none" rtlCol="0">
+            <a:spAutoFit/>
+          </a:bodyPr>
+          <a:lstStyle/>
+          <a:p>
+            <a:r>
+              <a:rPr lang="ja-JP" altLang="ja-JP" b="1" dirty="0"/>
+              <a:t>ページ４</a:t>
+            </a:r>
+            <a:endParaRPr lang="ja-JP" altLang="ja-JP" dirty="0"/>
+          </a:p>
+          <a:p>
+            <a:r>
+              <a:rPr lang="ja-JP" altLang="ja-JP" dirty="0"/>
+              <a:t>グルメ：日田市の名物料理やおすすめの飲食店を紹介する。</a:t>
+            </a:r>
+          </a:p>
+          <a:p>
+            <a:r>
+              <a:rPr lang="ja-JP" altLang="ja-JP" dirty="0"/>
+              <a:t>紹介する飲食店・名物料理：5～8店舗（品）</a:t>
+            </a:r>
+          </a:p>
+          <a:p>
+            <a:r>
+              <a:rPr lang="ja-JP" altLang="ja-JP" dirty="0"/>
+              <a:t>写真：各店舗・料理1枚（合計5～8枚程度）</a:t>
+            </a:r>
+          </a:p>
+          <a:p>
+            <a:r>
+              <a:rPr lang="ja-JP" altLang="ja-JP" dirty="0"/>
+              <a:t>文章量：各店舗・料理約80～120文字</a:t>
+            </a:r>
+          </a:p>
+        </p:txBody>
+      </p:sp>
+      <p:sp>
+        <p:nvSpPr>
+          <p:cNvPr id="8" name="テキスト ボックス 7">
+            <a:extLst>
+              <a:ext uri="{FF2B5EF4-FFF2-40B4-BE49-F238E27FC236}">
+                <a16:creationId xmlns:a16="http://schemas.microsoft.com/office/drawing/2014/main" id="{ABAC3640-3233-01D7-7363-DEFF23EE89F6}"/>
+              </a:ext>
+            </a:extLst>
+          </p:cNvPr>
+          <p:cNvSpPr txBox="1"/>
+          <p:nvPr/>
+        </p:nvSpPr>
+        <p:spPr>
+          <a:xfrm>
+            <a:off x="5413891" y="3019360"/>
+            <a:ext cx="6878806" cy="1477328"/>
+          </a:xfrm>
+          <a:prstGeom prst="rect">
+            <a:avLst/>
+          </a:prstGeom>
+          <a:noFill/>
+        </p:spPr>
+        <p:txBody>
+          <a:bodyPr wrap="none" rtlCol="0">
+            <a:spAutoFit/>
+          </a:bodyPr>
+          <a:lstStyle/>
+          <a:p>
+            <a:r>
+              <a:rPr lang="ja-JP" altLang="ja-JP" b="1" dirty="0"/>
+              <a:t>ページ５</a:t>
+            </a:r>
+            <a:endParaRPr lang="ja-JP" altLang="ja-JP" dirty="0"/>
+          </a:p>
+          <a:p>
+            <a:r>
+              <a:rPr lang="ja-JP" altLang="ja-JP" dirty="0"/>
+              <a:t>イベント：日田市で開催される季節ごとのイベントを紹介する。</a:t>
+            </a:r>
+          </a:p>
+          <a:p>
+            <a:r>
+              <a:rPr lang="ja-JP" altLang="ja-JP" dirty="0"/>
+              <a:t>紹介するイベント：5～6件</a:t>
+            </a:r>
+          </a:p>
+          <a:p>
+            <a:r>
+              <a:rPr lang="ja-JP" altLang="ja-JP" dirty="0"/>
+              <a:t>写真：各イベント1枚（合計5～6枚程度）</a:t>
+            </a:r>
+          </a:p>
+          <a:p>
+            <a:r>
+              <a:rPr lang="ja-JP" altLang="ja-JP" dirty="0"/>
+              <a:t>文章量：各イベント約100文字</a:t>
+            </a:r>
+          </a:p>
+        </p:txBody>
+      </p:sp>
+      <p:sp>
+        <p:nvSpPr>
+          <p:cNvPr id="9" name="テキスト ボックス 8">
+            <a:extLst>
+              <a:ext uri="{FF2B5EF4-FFF2-40B4-BE49-F238E27FC236}">
+                <a16:creationId xmlns:a16="http://schemas.microsoft.com/office/drawing/2014/main" id="{492CBCC5-2258-DA1F-07C1-7B6CADA10172}"/>
+              </a:ext>
+            </a:extLst>
+          </p:cNvPr>
+          <p:cNvSpPr txBox="1"/>
+          <p:nvPr/>
+        </p:nvSpPr>
+        <p:spPr>
+          <a:xfrm>
+            <a:off x="5413890" y="4718332"/>
+            <a:ext cx="6417141" cy="1754326"/>
+          </a:xfrm>
+          <a:prstGeom prst="rect">
+            <a:avLst/>
+          </a:prstGeom>
+          <a:noFill/>
+        </p:spPr>
+        <p:txBody>
+          <a:bodyPr wrap="none" rtlCol="0">
+            <a:spAutoFit/>
+          </a:bodyPr>
+          <a:lstStyle/>
+          <a:p>
+            <a:r>
+              <a:rPr lang="ja-JP" altLang="ja-JP" b="1" dirty="0"/>
+              <a:t>ページ６</a:t>
+            </a:r>
+            <a:endParaRPr lang="ja-JP" altLang="ja-JP" dirty="0"/>
+          </a:p>
+          <a:p>
+            <a:r>
+              <a:rPr lang="ja-JP" altLang="ja-JP" dirty="0"/>
+              <a:t>アクセス：日田市へのアクセス方法や周辺地図を掲載する。</a:t>
+            </a:r>
+          </a:p>
+          <a:p>
+            <a:r>
+              <a:rPr lang="ja-JP" altLang="ja-JP" dirty="0"/>
+              <a:t>日田市へのアクセス方法</a:t>
+            </a:r>
+          </a:p>
+          <a:p>
+            <a:r>
+              <a:rPr lang="ja-JP" altLang="ja-JP" dirty="0"/>
+              <a:t>地図：1～2点</a:t>
+            </a:r>
+          </a:p>
+          <a:p>
+            <a:r>
+              <a:rPr lang="ja-JP" altLang="ja-JP" dirty="0"/>
+              <a:t>文章量：約300～500文字</a:t>
+            </a:r>
+          </a:p>
+          <a:p>
+            <a:r>
+              <a:rPr lang="ja-JP" altLang="ja-JP" dirty="0"/>
+              <a:t>交通手段（JR・高速道路・バスなど）を掲載</a:t>
+            </a:r>
+          </a:p>
+        </p:txBody>
+      </p:sp>
+      <p:sp>
+        <p:nvSpPr>
+          <p:cNvPr id="12" name="テキスト ボックス 11">
+            <a:extLst>
+              <a:ext uri="{FF2B5EF4-FFF2-40B4-BE49-F238E27FC236}">
+                <a16:creationId xmlns:a16="http://schemas.microsoft.com/office/drawing/2014/main" id="{D4AFEB23-CDCD-FC58-18A6-D2D1E688C804}"/>
+              </a:ext>
+            </a:extLst>
+          </p:cNvPr>
+          <p:cNvSpPr txBox="1"/>
+          <p:nvPr/>
+        </p:nvSpPr>
+        <p:spPr>
+          <a:xfrm>
+            <a:off x="0" y="275092"/>
+            <a:ext cx="12192000" cy="707886"/>
+          </a:xfrm>
+          <a:prstGeom prst="rect">
+            <a:avLst/>
+          </a:prstGeom>
+          <a:solidFill>
+            <a:srgbClr val="0070C0"/>
+          </a:solidFill>
+        </p:spPr>
+        <p:txBody>
+          <a:bodyPr wrap="square" rtlCol="0">
+            <a:spAutoFit/>
+          </a:bodyPr>
+          <a:lstStyle/>
+          <a:p>
+            <a:r>
+              <a:rPr lang="en-US" altLang="ja-JP" sz="4000" dirty="0"/>
+              <a:t> </a:t>
+            </a:r>
+            <a:r>
+              <a:rPr lang="ja-JP" altLang="ja-JP" sz="4000" dirty="0"/>
+              <a:t>テーマ①：日田市紹介サイトの制作</a:t>
+            </a:r>
+            <a:endParaRPr lang="ja-JP" altLang="en-US" sz="4000" dirty="0"/>
+          </a:p>
+        </p:txBody>
+      </p:sp>
+      <p:sp>
+        <p:nvSpPr>
+          <p:cNvPr id="14" name="テキスト ボックス 13">
+            <a:extLst>
+              <a:ext uri="{FF2B5EF4-FFF2-40B4-BE49-F238E27FC236}">
+                <a16:creationId xmlns:a16="http://schemas.microsoft.com/office/drawing/2014/main" id="{613DC4E0-EA48-6404-DC2F-61C4364B8555}"/>
+              </a:ext>
+            </a:extLst>
+          </p:cNvPr>
+          <p:cNvSpPr txBox="1"/>
+          <p:nvPr/>
+        </p:nvSpPr>
+        <p:spPr>
+          <a:xfrm>
+            <a:off x="304799" y="1257974"/>
+            <a:ext cx="3262432" cy="707886"/>
+          </a:xfrm>
+          <a:prstGeom prst="rect">
+            <a:avLst/>
+          </a:prstGeom>
+          <a:noFill/>
+        </p:spPr>
+        <p:txBody>
+          <a:bodyPr wrap="none" rtlCol="0">
+            <a:spAutoFit/>
+          </a:bodyPr>
+          <a:lstStyle/>
+          <a:p>
+            <a:r>
+              <a:rPr lang="ja-JP" altLang="en-US" sz="4000" dirty="0"/>
+              <a:t>掲載</a:t>
+            </a:r>
+            <a:r>
+              <a:rPr lang="ja-JP" altLang="ja-JP" sz="4000" dirty="0"/>
+              <a:t>予定内容</a:t>
+            </a:r>
+            <a:endParaRPr kumimoji="1" lang="ja-JP" altLang="en-US" sz="4000" dirty="0"/>
+          </a:p>
+        </p:txBody>
+      </p:sp>
     </p:spTree>
     <p:extLst>
       <p:ext uri="{BB962C8B-B14F-4D97-AF65-F5344CB8AC3E}">
@@ -4394,7 +4822,7 @@
         </p:nvSpPr>
         <p:spPr>
           <a:xfrm>
-            <a:off x="1202835" y="650513"/>
+            <a:off x="1709584" y="1327846"/>
             <a:ext cx="9653364" cy="5155006"/>
           </a:xfrm>
           <a:prstGeom prst="rect">
@@ -4441,7 +4869,7 @@
         </p:nvSpPr>
         <p:spPr>
           <a:xfrm>
-            <a:off x="1528091" y="1000317"/>
+            <a:off x="2034840" y="1677650"/>
             <a:ext cx="9015125" cy="638239"/>
           </a:xfrm>
           <a:prstGeom prst="rect">
@@ -4490,7 +4918,7 @@
         </p:nvSpPr>
         <p:spPr>
           <a:xfrm>
-            <a:off x="1528091" y="1779705"/>
+            <a:off x="2034840" y="2457038"/>
             <a:ext cx="1632419" cy="3804886"/>
           </a:xfrm>
           <a:prstGeom prst="rect">
@@ -4539,7 +4967,7 @@
         </p:nvSpPr>
         <p:spPr>
           <a:xfrm>
-            <a:off x="3301659" y="1779705"/>
+            <a:off x="3808408" y="2457038"/>
             <a:ext cx="7241557" cy="447994"/>
           </a:xfrm>
           <a:prstGeom prst="rect">
@@ -4585,7 +5013,7 @@
         </p:nvSpPr>
         <p:spPr>
           <a:xfrm>
-            <a:off x="3344617" y="2313615"/>
+            <a:off x="3851366" y="2990948"/>
             <a:ext cx="7198599" cy="3252564"/>
           </a:xfrm>
           <a:prstGeom prst="rect">
@@ -4638,7 +5066,7 @@
         </p:nvSpPr>
         <p:spPr>
           <a:xfrm>
-            <a:off x="3436671" y="1834937"/>
+            <a:off x="3943420" y="2512270"/>
             <a:ext cx="1043275" cy="276162"/>
           </a:xfrm>
           <a:prstGeom prst="rect">
@@ -4688,7 +5116,7 @@
         </p:nvSpPr>
         <p:spPr>
           <a:xfrm>
-            <a:off x="4614958" y="1865621"/>
+            <a:off x="5121707" y="2542954"/>
             <a:ext cx="1043275" cy="276162"/>
           </a:xfrm>
           <a:prstGeom prst="rect">
@@ -4738,7 +5166,7 @@
         </p:nvSpPr>
         <p:spPr>
           <a:xfrm>
-            <a:off x="5879162" y="1850279"/>
+            <a:off x="6385911" y="2527612"/>
             <a:ext cx="1043275" cy="276162"/>
           </a:xfrm>
           <a:prstGeom prst="rect">
@@ -4784,7 +5212,7 @@
         </p:nvSpPr>
         <p:spPr>
           <a:xfrm>
-            <a:off x="3498040" y="2522271"/>
+            <a:off x="4004789" y="3199604"/>
             <a:ext cx="6646277" cy="1693788"/>
           </a:xfrm>
           <a:prstGeom prst="rect">
@@ -4833,7 +5261,7 @@
         </p:nvSpPr>
         <p:spPr>
           <a:xfrm>
-            <a:off x="3498040" y="2522271"/>
+            <a:off x="4004789" y="3199604"/>
             <a:ext cx="2528408" cy="1098508"/>
           </a:xfrm>
           <a:prstGeom prst="rect">
@@ -4882,7 +5310,7 @@
         </p:nvSpPr>
         <p:spPr>
           <a:xfrm>
-            <a:off x="3485766" y="4409371"/>
+            <a:off x="3992515" y="5086704"/>
             <a:ext cx="6646277" cy="1098508"/>
           </a:xfrm>
           <a:prstGeom prst="rect">
@@ -4931,7 +5359,7 @@
         </p:nvSpPr>
         <p:spPr>
           <a:xfrm>
-            <a:off x="3485766" y="4409371"/>
+            <a:off x="3992515" y="5086704"/>
             <a:ext cx="2528408" cy="1098508"/>
           </a:xfrm>
           <a:prstGeom prst="rect">
@@ -4963,6 +5391,84 @@
               <a:rPr kumimoji="1" lang="ja-JP" altLang="en-US" dirty="0"/>
               <a:t>写真</a:t>
             </a:r>
+          </a:p>
+        </p:txBody>
+      </p:sp>
+      <p:sp>
+        <p:nvSpPr>
+          <p:cNvPr id="8" name="テキスト ボックス 7">
+            <a:extLst>
+              <a:ext uri="{FF2B5EF4-FFF2-40B4-BE49-F238E27FC236}">
+                <a16:creationId xmlns:a16="http://schemas.microsoft.com/office/drawing/2014/main" id="{4A67926E-4E19-7D5D-26F7-25BE8EAD1E40}"/>
+              </a:ext>
+            </a:extLst>
+          </p:cNvPr>
+          <p:cNvSpPr txBox="1"/>
+          <p:nvPr/>
+        </p:nvSpPr>
+        <p:spPr>
+          <a:xfrm>
+            <a:off x="0" y="275092"/>
+            <a:ext cx="12192000" cy="707886"/>
+          </a:xfrm>
+          <a:prstGeom prst="rect">
+            <a:avLst/>
+          </a:prstGeom>
+          <a:solidFill>
+            <a:srgbClr val="0070C0"/>
+          </a:solidFill>
+        </p:spPr>
+        <p:txBody>
+          <a:bodyPr wrap="square" rtlCol="0">
+            <a:spAutoFit/>
+          </a:bodyPr>
+          <a:lstStyle/>
+          <a:p>
+            <a:r>
+              <a:rPr lang="en-US" altLang="ja-JP" sz="4000" dirty="0"/>
+              <a:t> </a:t>
+            </a:r>
+            <a:r>
+              <a:rPr lang="ja-JP" altLang="ja-JP" sz="4000" dirty="0"/>
+              <a:t>テーマ①：日田市紹介サイトの制作</a:t>
+            </a:r>
+            <a:endParaRPr lang="ja-JP" altLang="en-US" sz="4000" dirty="0"/>
+          </a:p>
+        </p:txBody>
+      </p:sp>
+      <p:sp>
+        <p:nvSpPr>
+          <p:cNvPr id="10" name="テキスト ボックス 9">
+            <a:extLst>
+              <a:ext uri="{FF2B5EF4-FFF2-40B4-BE49-F238E27FC236}">
+                <a16:creationId xmlns:a16="http://schemas.microsoft.com/office/drawing/2014/main" id="{56A0F9C6-E177-0ED5-1651-C391935A1DC7}"/>
+              </a:ext>
+            </a:extLst>
+          </p:cNvPr>
+          <p:cNvSpPr txBox="1"/>
+          <p:nvPr/>
+        </p:nvSpPr>
+        <p:spPr>
+          <a:xfrm>
+            <a:off x="417202" y="1843950"/>
+            <a:ext cx="800219" cy="3170099"/>
+          </a:xfrm>
+          <a:prstGeom prst="rect">
+            <a:avLst/>
+          </a:prstGeom>
+          <a:noFill/>
+        </p:spPr>
+        <p:txBody>
+          <a:bodyPr vert="eaVert" wrap="none" rtlCol="0">
+            <a:spAutoFit/>
+          </a:bodyPr>
+          <a:lstStyle/>
+          <a:p>
+            <a:r>
+              <a:rPr lang="ja-JP" altLang="ja-JP" sz="4000" dirty="0"/>
+              <a:t>完成イメージ</a:t>
+            </a:r>
+            <a:endParaRPr lang="en-US" altLang="ja-JP" sz="4000" dirty="0"/>
           </a:p>
         </p:txBody>
       </p:sp>
@@ -5156,10 +5662,10 @@
       </p:sp>
       <p:sp>
         <p:nvSpPr>
-          <p:cNvPr id="11" name="テキスト ボックス 10">
-            <a:extLst>
-              <a:ext uri="{FF2B5EF4-FFF2-40B4-BE49-F238E27FC236}">
-                <a16:creationId xmlns:a16="http://schemas.microsoft.com/office/drawing/2014/main" id="{1C0353BC-833C-2DCB-D40A-4A62CDBC6EA7}"/>
+          <p:cNvPr id="12" name="テキスト ボックス 11">
+            <a:extLst>
+              <a:ext uri="{FF2B5EF4-FFF2-40B4-BE49-F238E27FC236}">
+                <a16:creationId xmlns:a16="http://schemas.microsoft.com/office/drawing/2014/main" id="{0D0BFB82-D13B-1FC7-5611-C10829CA8C74}"/>
               </a:ext>
             </a:extLst>
           </p:cNvPr>
@@ -5168,8 +5674,8 @@
         </p:nvSpPr>
         <p:spPr>
           <a:xfrm>
-            <a:off x="6493933" y="1632521"/>
-            <a:ext cx="5314275" cy="1323439"/>
+            <a:off x="373984" y="2436752"/>
+            <a:ext cx="5562741" cy="646331"/>
           </a:xfrm>
           <a:prstGeom prst="rect">
             <a:avLst/>
@@ -5183,30 +5689,26 @@
           <a:lstStyle/>
           <a:p>
             <a:r>
-              <a:rPr lang="ja-JP" altLang="ja-JP" sz="4000" dirty="0"/>
-              <a:t>3Dマップの完成</a:t>
-            </a:r>
-            <a:endParaRPr lang="en-US" altLang="ja-JP" sz="4000" dirty="0"/>
-          </a:p>
-          <a:p>
-            <a:r>
-              <a:rPr lang="ja-JP" altLang="en-US" sz="4000" dirty="0"/>
-              <a:t>　　　　　　</a:t>
-            </a:r>
-            <a:r>
-              <a:rPr lang="ja-JP" altLang="ja-JP" sz="4000" dirty="0"/>
-              <a:t>イメージ</a:t>
-            </a:r>
-            <a:endParaRPr lang="en-US" altLang="ja-JP" sz="4000" dirty="0"/>
-          </a:p>
-        </p:txBody>
-      </p:sp>
-      <p:sp>
-        <p:nvSpPr>
-          <p:cNvPr id="12" name="テキスト ボックス 11">
-            <a:extLst>
-              <a:ext uri="{FF2B5EF4-FFF2-40B4-BE49-F238E27FC236}">
-                <a16:creationId xmlns:a16="http://schemas.microsoft.com/office/drawing/2014/main" id="{0D0BFB82-D13B-1FC7-5611-C10829CA8C74}"/>
+              <a:rPr lang="ja-JP" altLang="ja-JP" dirty="0"/>
+              <a:t>3D観光マップを制作し、観光地の位置関係を分かり</a:t>
+            </a:r>
+            <a:endParaRPr lang="en-US" altLang="ja-JP" dirty="0"/>
+          </a:p>
+          <a:p>
+            <a:r>
+              <a:rPr lang="ja-JP" altLang="ja-JP" dirty="0"/>
+              <a:t>やすく伝え、観光ルートの検討を支援する。</a:t>
+            </a:r>
+            <a:endParaRPr lang="en-US" altLang="ja-JP" dirty="0"/>
+          </a:p>
+        </p:txBody>
+      </p:sp>
+      <p:sp>
+        <p:nvSpPr>
+          <p:cNvPr id="13" name="テキスト ボックス 12">
+            <a:extLst>
+              <a:ext uri="{FF2B5EF4-FFF2-40B4-BE49-F238E27FC236}">
+                <a16:creationId xmlns:a16="http://schemas.microsoft.com/office/drawing/2014/main" id="{DE2C3D34-4593-CEAA-0C72-02A5DE70DE78}"/>
               </a:ext>
             </a:extLst>
           </p:cNvPr>
@@ -5215,7 +5717,7 @@
         </p:nvSpPr>
         <p:spPr>
           <a:xfrm>
-            <a:off x="373984" y="2436752"/>
+            <a:off x="373984" y="3983659"/>
             <a:ext cx="5562741" cy="646331"/>
           </a:xfrm>
           <a:prstGeom prst="rect">
@@ -5231,25 +5733,32 @@
           <a:p>
             <a:r>
               <a:rPr lang="ja-JP" altLang="ja-JP" dirty="0"/>
-              <a:t>3D観光マップを制作し、観光地の位置関係を分かり</a:t>
+              <a:t>従来の地図では伝わりにくい位置関係を、</a:t>
+            </a:r>
+            <a:r>
+              <a:rPr lang="en-US" altLang="ja-JP" dirty="0"/>
+              <a:t>3D</a:t>
+            </a:r>
+            <a:r>
+              <a:rPr lang="ja-JP" altLang="ja-JP" dirty="0"/>
+              <a:t>技術を</a:t>
             </a:r>
             <a:endParaRPr lang="en-US" altLang="ja-JP" dirty="0"/>
           </a:p>
           <a:p>
             <a:r>
               <a:rPr lang="ja-JP" altLang="ja-JP" dirty="0"/>
-              <a:t>やすく伝え、観光ルートの検討を支援する。</a:t>
-            </a:r>
-            <a:endParaRPr lang="en-US" altLang="ja-JP" dirty="0"/>
-          </a:p>
-        </p:txBody>
-      </p:sp>
-      <p:sp>
-        <p:nvSpPr>
-          <p:cNvPr id="13" name="テキスト ボックス 12">
-            <a:extLst>
-              <a:ext uri="{FF2B5EF4-FFF2-40B4-BE49-F238E27FC236}">
-                <a16:creationId xmlns:a16="http://schemas.microsoft.com/office/drawing/2014/main" id="{DE2C3D34-4593-CEAA-0C72-02A5DE70DE78}"/>
+              <a:t>使って分かりやすく伝えたい。</a:t>
+            </a:r>
+          </a:p>
+        </p:txBody>
+      </p:sp>
+      <p:sp>
+        <p:nvSpPr>
+          <p:cNvPr id="14" name="テキスト ボックス 13">
+            <a:extLst>
+              <a:ext uri="{FF2B5EF4-FFF2-40B4-BE49-F238E27FC236}">
+                <a16:creationId xmlns:a16="http://schemas.microsoft.com/office/drawing/2014/main" id="{02248BEF-2F20-0A4B-250B-6C9E4B250B9B}"/>
               </a:ext>
             </a:extLst>
           </p:cNvPr>
@@ -5258,8 +5767,8 @@
         </p:nvSpPr>
         <p:spPr>
           <a:xfrm>
-            <a:off x="373984" y="3983659"/>
-            <a:ext cx="5562741" cy="646331"/>
+            <a:off x="373984" y="5528734"/>
+            <a:ext cx="5509842" cy="646331"/>
           </a:xfrm>
           <a:prstGeom prst="rect">
             <a:avLst/>
@@ -5274,32 +5783,25 @@
           <a:p>
             <a:r>
               <a:rPr lang="ja-JP" altLang="ja-JP" dirty="0"/>
-              <a:t>従来の地図では伝わりにくい位置関係を、</a:t>
-            </a:r>
-            <a:r>
-              <a:rPr lang="en-US" altLang="ja-JP" dirty="0"/>
-              <a:t>3D</a:t>
-            </a:r>
+              <a:t>3Dマップを操作しながら観光スポットを確認し、</a:t>
+            </a:r>
+            <a:endParaRPr lang="en-US" altLang="ja-JP" dirty="0"/>
+          </a:p>
+          <a:p>
             <a:r>
               <a:rPr lang="ja-JP" altLang="ja-JP" dirty="0"/>
-              <a:t>技術を</a:t>
-            </a:r>
-            <a:endParaRPr lang="en-US" altLang="ja-JP" dirty="0"/>
-          </a:p>
-          <a:p>
-            <a:r>
-              <a:rPr lang="ja-JP" altLang="ja-JP" dirty="0"/>
-              <a:t>使って分かりやすく伝えたい。</a:t>
-            </a:r>
-          </a:p>
-        </p:txBody>
-      </p:sp>
-      <p:sp>
-        <p:nvSpPr>
-          <p:cNvPr id="14" name="テキスト ボックス 13">
-            <a:extLst>
-              <a:ext uri="{FF2B5EF4-FFF2-40B4-BE49-F238E27FC236}">
-                <a16:creationId xmlns:a16="http://schemas.microsoft.com/office/drawing/2014/main" id="{02248BEF-2F20-0A4B-250B-6C9E4B250B9B}"/>
+              <a:t>紹介サイトへ遷移できるWebコンテンツを目指す。</a:t>
+            </a:r>
+            <a:endParaRPr lang="ja-JP" altLang="en-US" dirty="0"/>
+          </a:p>
+        </p:txBody>
+      </p:sp>
+      <p:sp>
+        <p:nvSpPr>
+          <p:cNvPr id="2" name="テキスト ボックス 1">
+            <a:extLst>
+              <a:ext uri="{FF2B5EF4-FFF2-40B4-BE49-F238E27FC236}">
+                <a16:creationId xmlns:a16="http://schemas.microsoft.com/office/drawing/2014/main" id="{CC562A6E-4BF8-FC9F-C4AF-3923D701A981}"/>
               </a:ext>
             </a:extLst>
           </p:cNvPr>
@@ -5308,8 +5810,8 @@
         </p:nvSpPr>
         <p:spPr>
           <a:xfrm>
-            <a:off x="373984" y="5528734"/>
-            <a:ext cx="5509842" cy="646331"/>
+            <a:off x="6527799" y="1632521"/>
+            <a:ext cx="5827236" cy="1323439"/>
           </a:xfrm>
           <a:prstGeom prst="rect">
             <a:avLst/>
@@ -5323,26 +5825,26 @@
           <a:lstStyle/>
           <a:p>
             <a:r>
-              <a:rPr lang="ja-JP" altLang="ja-JP" dirty="0"/>
-              <a:t>3Dマップを操作しながら観光スポットを確認し、</a:t>
-            </a:r>
-            <a:endParaRPr lang="en-US" altLang="ja-JP" dirty="0"/>
-          </a:p>
-          <a:p>
-            <a:r>
-              <a:rPr lang="ja-JP" altLang="ja-JP" dirty="0"/>
-              <a:t>紹介サイトへ遷移できるWebコンテンツを目指す。</a:t>
-            </a:r>
-            <a:endParaRPr lang="ja-JP" altLang="en-US" dirty="0"/>
+              <a:rPr lang="ja-JP" altLang="en-US" sz="4000" dirty="0"/>
+              <a:t>制作内容</a:t>
+            </a:r>
+            <a:endParaRPr lang="en-US" altLang="ja-JP" sz="4000" dirty="0"/>
+          </a:p>
+          <a:p>
+            <a:r>
+              <a:rPr lang="ja-JP" altLang="en-US" sz="4000" dirty="0"/>
+              <a:t>（掲載予定コンテンツ）</a:t>
+            </a:r>
+            <a:endParaRPr kumimoji="1" lang="ja-JP" altLang="en-US" sz="4000" dirty="0"/>
           </a:p>
         </p:txBody>
       </p:sp>
       <p:pic>
         <p:nvPicPr>
-          <p:cNvPr id="17" name="図 16">
-            <a:extLst>
-              <a:ext uri="{FF2B5EF4-FFF2-40B4-BE49-F238E27FC236}">
-                <a16:creationId xmlns:a16="http://schemas.microsoft.com/office/drawing/2014/main" id="{B83CF779-725A-E42E-82D3-A2CB584357CD}"/>
+          <p:cNvPr id="4" name="図 3">
+            <a:extLst>
+              <a:ext uri="{FF2B5EF4-FFF2-40B4-BE49-F238E27FC236}">
+                <a16:creationId xmlns:a16="http://schemas.microsoft.com/office/drawing/2014/main" id="{CD544F45-0BB0-C4D9-7522-A0F72F419C0B}"/>
               </a:ext>
             </a:extLst>
           </p:cNvPr>
@@ -5365,18 +5867,681 @@
         </p:blipFill>
         <p:spPr>
           <a:xfrm>
-            <a:off x="6629223" y="2955960"/>
-            <a:ext cx="5324083" cy="3843988"/>
+            <a:off x="6308176" y="2915490"/>
+            <a:ext cx="5143500" cy="3429000"/>
           </a:xfrm>
           <a:prstGeom prst="rect">
             <a:avLst/>
           </a:prstGeom>
+          <a:ln>
+            <a:noFill/>
+          </a:ln>
+          <a:effectLst>
+            <a:softEdge rad="112500"/>
+          </a:effectLst>
         </p:spPr>
       </p:pic>
     </p:spTree>
     <p:extLst>
       <p:ext uri="{BB962C8B-B14F-4D97-AF65-F5344CB8AC3E}">
         <p14:creationId xmlns:p14="http://schemas.microsoft.com/office/powerpoint/2010/main" val="2433245664"/>
+      </p:ext>
+    </p:extLst>
+  </p:cSld>
+  <p:clrMapOvr>
+    <a:masterClrMapping/>
+  </p:clrMapOvr>
+</p:sld>
+</file>
+
+<file path=ppt/slides/slide6.xml><?xml version="1.0" encoding="utf-8"?>
+<p:sld xmlns:a="http://schemas.openxmlformats.org/drawingml/2006/main" xmlns:r="http://schemas.openxmlformats.org/officeDocument/2006/relationships" xmlns:p="http://schemas.openxmlformats.org/presentationml/2006/main">
+  <p:cSld>
+    <p:spTree>
+      <p:nvGrpSpPr>
+        <p:cNvPr id="1" name=""/>
+        <p:cNvGrpSpPr/>
+        <p:nvPr/>
+      </p:nvGrpSpPr>
+      <p:grpSpPr>
+        <a:xfrm>
+          <a:off x="0" y="0"/>
+          <a:ext cx="0" cy="0"/>
+          <a:chOff x="0" y="0"/>
+          <a:chExt cx="0" cy="0"/>
+        </a:xfrm>
+      </p:grpSpPr>
+      <p:sp>
+        <p:nvSpPr>
+          <p:cNvPr id="2" name="テキスト ボックス 1">
+            <a:extLst>
+              <a:ext uri="{FF2B5EF4-FFF2-40B4-BE49-F238E27FC236}">
+                <a16:creationId xmlns:a16="http://schemas.microsoft.com/office/drawing/2014/main" id="{D0DD932F-69DE-F5B5-53D1-80084795057B}"/>
+              </a:ext>
+            </a:extLst>
+          </p:cNvPr>
+          <p:cNvSpPr txBox="1"/>
+          <p:nvPr/>
+        </p:nvSpPr>
+        <p:spPr>
+          <a:xfrm>
+            <a:off x="0" y="275092"/>
+            <a:ext cx="12192000" cy="707886"/>
+          </a:xfrm>
+          <a:prstGeom prst="rect">
+            <a:avLst/>
+          </a:prstGeom>
+          <a:solidFill>
+            <a:srgbClr val="00B050"/>
+          </a:solidFill>
+        </p:spPr>
+        <p:txBody>
+          <a:bodyPr wrap="square" rtlCol="0">
+            <a:spAutoFit/>
+          </a:bodyPr>
+          <a:lstStyle/>
+          <a:p>
+            <a:r>
+              <a:rPr lang="en-US" altLang="ja-JP" sz="4000" dirty="0"/>
+              <a:t> </a:t>
+            </a:r>
+            <a:r>
+              <a:rPr lang="ja-JP" altLang="ja-JP" sz="4000" dirty="0"/>
+              <a:t>テーマ②</a:t>
+            </a:r>
+            <a:r>
+              <a:rPr lang="ja-JP" altLang="en-US" sz="4000" dirty="0"/>
+              <a:t>：</a:t>
+            </a:r>
+            <a:r>
+              <a:rPr lang="ja-JP" altLang="ja-JP" sz="4000" dirty="0"/>
+              <a:t>日田市3D観光マップの制作</a:t>
+            </a:r>
+            <a:endParaRPr lang="ja-JP" altLang="en-US" sz="4000" dirty="0"/>
+          </a:p>
+        </p:txBody>
+      </p:sp>
+      <p:sp>
+        <p:nvSpPr>
+          <p:cNvPr id="5" name="テキスト ボックス 4">
+            <a:extLst>
+              <a:ext uri="{FF2B5EF4-FFF2-40B4-BE49-F238E27FC236}">
+                <a16:creationId xmlns:a16="http://schemas.microsoft.com/office/drawing/2014/main" id="{66C608A4-1F57-59CE-5D0E-DF5A882873E1}"/>
+              </a:ext>
+            </a:extLst>
+          </p:cNvPr>
+          <p:cNvSpPr txBox="1"/>
+          <p:nvPr/>
+        </p:nvSpPr>
+        <p:spPr>
+          <a:xfrm>
+            <a:off x="304799" y="1257974"/>
+            <a:ext cx="3262432" cy="707886"/>
+          </a:xfrm>
+          <a:prstGeom prst="rect">
+            <a:avLst/>
+          </a:prstGeom>
+          <a:noFill/>
+        </p:spPr>
+        <p:txBody>
+          <a:bodyPr wrap="none" rtlCol="0">
+            <a:spAutoFit/>
+          </a:bodyPr>
+          <a:lstStyle/>
+          <a:p>
+            <a:r>
+              <a:rPr lang="ja-JP" altLang="en-US" sz="4000" dirty="0"/>
+              <a:t>掲載</a:t>
+            </a:r>
+            <a:r>
+              <a:rPr lang="ja-JP" altLang="ja-JP" sz="4000" dirty="0"/>
+              <a:t>予定内容</a:t>
+            </a:r>
+            <a:endParaRPr kumimoji="1" lang="ja-JP" altLang="en-US" sz="4000" dirty="0"/>
+          </a:p>
+        </p:txBody>
+      </p:sp>
+      <p:sp>
+        <p:nvSpPr>
+          <p:cNvPr id="6" name="テキスト ボックス 5">
+            <a:extLst>
+              <a:ext uri="{FF2B5EF4-FFF2-40B4-BE49-F238E27FC236}">
+                <a16:creationId xmlns:a16="http://schemas.microsoft.com/office/drawing/2014/main" id="{6337D76F-D6E8-7C98-31EE-DBBF3D6B6819}"/>
+              </a:ext>
+            </a:extLst>
+          </p:cNvPr>
+          <p:cNvSpPr txBox="1"/>
+          <p:nvPr/>
+        </p:nvSpPr>
+        <p:spPr>
+          <a:xfrm>
+            <a:off x="304799" y="1965860"/>
+            <a:ext cx="3185487" cy="1200329"/>
+          </a:xfrm>
+          <a:prstGeom prst="rect">
+            <a:avLst/>
+          </a:prstGeom>
+          <a:noFill/>
+        </p:spPr>
+        <p:txBody>
+          <a:bodyPr wrap="none" rtlCol="0">
+            <a:spAutoFit/>
+          </a:bodyPr>
+          <a:lstStyle/>
+          <a:p>
+            <a:r>
+              <a:rPr lang="ja-JP" altLang="ja-JP" b="1" dirty="0"/>
+              <a:t>ページ１</a:t>
+            </a:r>
+            <a:endParaRPr lang="ja-JP" altLang="ja-JP" dirty="0"/>
+          </a:p>
+          <a:p>
+            <a:r>
+              <a:rPr lang="ja-JP" altLang="ja-JP" dirty="0"/>
+              <a:t>トップページ：サイトの概要</a:t>
+            </a:r>
+          </a:p>
+          <a:p>
+            <a:r>
+              <a:rPr lang="ja-JP" altLang="ja-JP" dirty="0"/>
+              <a:t>3D観光マップの使い方</a:t>
+            </a:r>
+          </a:p>
+          <a:p>
+            <a:r>
+              <a:rPr lang="ja-JP" altLang="ja-JP" dirty="0"/>
+              <a:t>各ページへのメニュー</a:t>
+            </a:r>
+          </a:p>
+        </p:txBody>
+      </p:sp>
+      <p:sp>
+        <p:nvSpPr>
+          <p:cNvPr id="7" name="テキスト ボックス 6">
+            <a:extLst>
+              <a:ext uri="{FF2B5EF4-FFF2-40B4-BE49-F238E27FC236}">
+                <a16:creationId xmlns:a16="http://schemas.microsoft.com/office/drawing/2014/main" id="{36CB6420-FA01-F4F2-3448-5C6EDFA5AB01}"/>
+              </a:ext>
+            </a:extLst>
+          </p:cNvPr>
+          <p:cNvSpPr txBox="1"/>
+          <p:nvPr/>
+        </p:nvSpPr>
+        <p:spPr>
+          <a:xfrm>
+            <a:off x="304799" y="3258697"/>
+            <a:ext cx="7409401" cy="3416320"/>
+          </a:xfrm>
+          <a:prstGeom prst="rect">
+            <a:avLst/>
+          </a:prstGeom>
+          <a:noFill/>
+        </p:spPr>
+        <p:txBody>
+          <a:bodyPr wrap="none" rtlCol="0">
+            <a:spAutoFit/>
+          </a:bodyPr>
+          <a:lstStyle/>
+          <a:p>
+            <a:r>
+              <a:rPr lang="ja-JP" altLang="ja-JP" b="1" dirty="0"/>
+              <a:t>ページ２</a:t>
+            </a:r>
+            <a:endParaRPr lang="ja-JP" altLang="ja-JP" dirty="0"/>
+          </a:p>
+          <a:p>
+            <a:r>
+              <a:rPr lang="ja-JP" altLang="ja-JP" dirty="0"/>
+              <a:t>3D観光マップ：日田市を簡略化した3Dマップ</a:t>
+            </a:r>
+            <a:endParaRPr lang="en-US" altLang="ja-JP" dirty="0"/>
+          </a:p>
+          <a:p>
+            <a:endParaRPr lang="ja-JP" altLang="ja-JP" dirty="0"/>
+          </a:p>
+          <a:p>
+            <a:r>
+              <a:rPr lang="ja-JP" altLang="ja-JP" dirty="0"/>
+              <a:t>制作範囲</a:t>
+            </a:r>
+          </a:p>
+          <a:p>
+            <a:r>
+              <a:rPr lang="ja-JP" altLang="ja-JP" dirty="0"/>
+              <a:t>日田市を簡略化した3Dマップを制作</a:t>
+            </a:r>
+          </a:p>
+          <a:p>
+            <a:r>
+              <a:rPr lang="ja-JP" altLang="ja-JP" dirty="0"/>
+              <a:t>テーマ１で紹介した観光スポットを3Dマップ上に配置</a:t>
+            </a:r>
+          </a:p>
+          <a:p>
+            <a:r>
+              <a:rPr lang="ja-JP" altLang="ja-JP" dirty="0"/>
+              <a:t>地形・建物を簡易的な3Dモデルで表現</a:t>
+            </a:r>
+            <a:r>
+              <a:rPr lang="ja-JP" altLang="en-US" dirty="0"/>
+              <a:t>、</a:t>
+            </a:r>
+            <a:r>
+              <a:rPr lang="ja-JP" altLang="ja-JP" dirty="0"/>
+              <a:t>山・川・道路を簡易的に表現</a:t>
+            </a:r>
+            <a:endParaRPr lang="en-US" altLang="ja-JP" dirty="0"/>
+          </a:p>
+          <a:p>
+            <a:endParaRPr lang="en-US" altLang="ja-JP" dirty="0"/>
+          </a:p>
+          <a:p>
+            <a:r>
+              <a:rPr lang="ja-JP" altLang="ja-JP" dirty="0"/>
+              <a:t>機能</a:t>
+            </a:r>
+          </a:p>
+          <a:p>
+            <a:r>
+              <a:rPr lang="ja-JP" altLang="ja-JP" dirty="0"/>
+              <a:t>マウスによる回転</a:t>
+            </a:r>
+            <a:r>
+              <a:rPr lang="ja-JP" altLang="en-US" dirty="0"/>
+              <a:t>、</a:t>
+            </a:r>
+            <a:r>
+              <a:rPr lang="ja-JP" altLang="ja-JP" dirty="0"/>
+              <a:t>拡大・縮小</a:t>
+            </a:r>
+          </a:p>
+          <a:p>
+            <a:r>
+              <a:rPr lang="ja-JP" altLang="ja-JP" dirty="0"/>
+              <a:t>観光スポットの表示</a:t>
+            </a:r>
+            <a:r>
+              <a:rPr lang="ja-JP" altLang="en-US" dirty="0"/>
+              <a:t>、</a:t>
+            </a:r>
+            <a:r>
+              <a:rPr lang="ja-JP" altLang="ja-JP" dirty="0"/>
+              <a:t>観光スポットの選択（クリック）</a:t>
+            </a:r>
+          </a:p>
+          <a:p>
+            <a:r>
+              <a:rPr lang="ja-JP" altLang="ja-JP" dirty="0"/>
+              <a:t>テーマ１「日田市紹介サイト」の詳細ページへ遷移</a:t>
+            </a:r>
+          </a:p>
+        </p:txBody>
+      </p:sp>
+      <p:sp>
+        <p:nvSpPr>
+          <p:cNvPr id="8" name="テキスト ボックス 7">
+            <a:extLst>
+              <a:ext uri="{FF2B5EF4-FFF2-40B4-BE49-F238E27FC236}">
+                <a16:creationId xmlns:a16="http://schemas.microsoft.com/office/drawing/2014/main" id="{791FC01E-1EC9-6B98-6836-5F2B63BEE962}"/>
+              </a:ext>
+            </a:extLst>
+          </p:cNvPr>
+          <p:cNvSpPr txBox="1"/>
+          <p:nvPr/>
+        </p:nvSpPr>
+        <p:spPr>
+          <a:xfrm>
+            <a:off x="6383867" y="1257974"/>
+            <a:ext cx="3877985" cy="1477328"/>
+          </a:xfrm>
+          <a:prstGeom prst="rect">
+            <a:avLst/>
+          </a:prstGeom>
+          <a:noFill/>
+        </p:spPr>
+        <p:txBody>
+          <a:bodyPr wrap="none" rtlCol="0">
+            <a:spAutoFit/>
+          </a:bodyPr>
+          <a:lstStyle/>
+          <a:p>
+            <a:r>
+              <a:rPr lang="ja-JP" altLang="ja-JP" b="1" dirty="0"/>
+              <a:t>ページ３</a:t>
+            </a:r>
+            <a:endParaRPr lang="ja-JP" altLang="ja-JP" dirty="0"/>
+          </a:p>
+          <a:p>
+            <a:r>
+              <a:rPr lang="ja-JP" altLang="ja-JP" dirty="0"/>
+              <a:t>おすすめモデルコース：各コースの</a:t>
+            </a:r>
+            <a:endParaRPr lang="en-US" altLang="ja-JP" dirty="0"/>
+          </a:p>
+          <a:p>
+            <a:r>
+              <a:rPr lang="ja-JP" altLang="ja-JP" dirty="0"/>
+              <a:t>所要時間・移動順・見どころ</a:t>
+            </a:r>
+          </a:p>
+          <a:p>
+            <a:r>
+              <a:rPr lang="ja-JP" altLang="ja-JP" dirty="0"/>
+              <a:t>半日コース</a:t>
+            </a:r>
+            <a:r>
+              <a:rPr lang="ja-JP" altLang="en-US" dirty="0"/>
+              <a:t>、</a:t>
+            </a:r>
+            <a:r>
+              <a:rPr lang="ja-JP" altLang="ja-JP" dirty="0"/>
+              <a:t>1日コース</a:t>
+            </a:r>
+          </a:p>
+          <a:p>
+            <a:r>
+              <a:rPr lang="ja-JP" altLang="ja-JP" dirty="0"/>
+              <a:t>家族向けコース</a:t>
+            </a:r>
+            <a:r>
+              <a:rPr lang="ja-JP" altLang="en-US" dirty="0"/>
+              <a:t>、</a:t>
+            </a:r>
+            <a:r>
+              <a:rPr lang="ja-JP" altLang="ja-JP" dirty="0"/>
+              <a:t>グルメ中心コース</a:t>
+            </a:r>
+          </a:p>
+        </p:txBody>
+      </p:sp>
+      <p:sp>
+        <p:nvSpPr>
+          <p:cNvPr id="9" name="テキスト ボックス 8">
+            <a:extLst>
+              <a:ext uri="{FF2B5EF4-FFF2-40B4-BE49-F238E27FC236}">
+                <a16:creationId xmlns:a16="http://schemas.microsoft.com/office/drawing/2014/main" id="{C0E1D02D-2F90-E3AC-6F6D-387E69EA5BE4}"/>
+              </a:ext>
+            </a:extLst>
+          </p:cNvPr>
+          <p:cNvSpPr txBox="1"/>
+          <p:nvPr/>
+        </p:nvSpPr>
+        <p:spPr>
+          <a:xfrm>
+            <a:off x="6383867" y="3010298"/>
+            <a:ext cx="4801314" cy="1477328"/>
+          </a:xfrm>
+          <a:prstGeom prst="rect">
+            <a:avLst/>
+          </a:prstGeom>
+          <a:noFill/>
+        </p:spPr>
+        <p:txBody>
+          <a:bodyPr wrap="none" rtlCol="0">
+            <a:spAutoFit/>
+          </a:bodyPr>
+          <a:lstStyle/>
+          <a:p>
+            <a:r>
+              <a:rPr lang="ja-JP" altLang="ja-JP" b="1" dirty="0"/>
+              <a:t> ページ４</a:t>
+            </a:r>
+            <a:endParaRPr lang="ja-JP" altLang="ja-JP" dirty="0"/>
+          </a:p>
+          <a:p>
+            <a:r>
+              <a:rPr lang="ja-JP" altLang="ja-JP" dirty="0"/>
+              <a:t>アクセス情報：観光スポット間の移動ルート</a:t>
+            </a:r>
+          </a:p>
+          <a:p>
+            <a:r>
+              <a:rPr lang="ja-JP" altLang="ja-JP" dirty="0"/>
+              <a:t>所要時間</a:t>
+            </a:r>
+          </a:p>
+          <a:p>
+            <a:r>
+              <a:rPr lang="ja-JP" altLang="ja-JP" dirty="0"/>
+              <a:t>おすすめの移動手段</a:t>
+            </a:r>
+          </a:p>
+          <a:p>
+            <a:r>
+              <a:rPr lang="ja-JP" altLang="ja-JP" dirty="0"/>
+              <a:t>駐車場情報</a:t>
+            </a:r>
+          </a:p>
+        </p:txBody>
+      </p:sp>
+    </p:spTree>
+    <p:extLst>
+      <p:ext uri="{BB962C8B-B14F-4D97-AF65-F5344CB8AC3E}">
+        <p14:creationId xmlns:p14="http://schemas.microsoft.com/office/powerpoint/2010/main" val="2710012333"/>
+      </p:ext>
+    </p:extLst>
+  </p:cSld>
+  <p:clrMapOvr>
+    <a:masterClrMapping/>
+  </p:clrMapOvr>
+</p:sld>
+</file>
+
+<file path=ppt/slides/slide7.xml><?xml version="1.0" encoding="utf-8"?>
+<p:sld xmlns:a="http://schemas.openxmlformats.org/drawingml/2006/main" xmlns:r="http://schemas.openxmlformats.org/officeDocument/2006/relationships" xmlns:p="http://schemas.openxmlformats.org/presentationml/2006/main">
+  <p:cSld>
+    <p:spTree>
+      <p:nvGrpSpPr>
+        <p:cNvPr id="1" name=""/>
+        <p:cNvGrpSpPr/>
+        <p:nvPr/>
+      </p:nvGrpSpPr>
+      <p:grpSpPr>
+        <a:xfrm>
+          <a:off x="0" y="0"/>
+          <a:ext cx="0" cy="0"/>
+          <a:chOff x="0" y="0"/>
+          <a:chExt cx="0" cy="0"/>
+        </a:xfrm>
+      </p:grpSpPr>
+      <p:sp>
+        <p:nvSpPr>
+          <p:cNvPr id="2" name="テキスト ボックス 1">
+            <a:extLst>
+              <a:ext uri="{FF2B5EF4-FFF2-40B4-BE49-F238E27FC236}">
+                <a16:creationId xmlns:a16="http://schemas.microsoft.com/office/drawing/2014/main" id="{C5E1E929-6D91-4683-12C0-55BA69FBA77C}"/>
+              </a:ext>
+            </a:extLst>
+          </p:cNvPr>
+          <p:cNvSpPr txBox="1"/>
+          <p:nvPr/>
+        </p:nvSpPr>
+        <p:spPr>
+          <a:xfrm>
+            <a:off x="0" y="275092"/>
+            <a:ext cx="12192000" cy="707886"/>
+          </a:xfrm>
+          <a:prstGeom prst="rect">
+            <a:avLst/>
+          </a:prstGeom>
+          <a:solidFill>
+            <a:srgbClr val="00B050"/>
+          </a:solidFill>
+        </p:spPr>
+        <p:txBody>
+          <a:bodyPr wrap="square" rtlCol="0">
+            <a:spAutoFit/>
+          </a:bodyPr>
+          <a:lstStyle/>
+          <a:p>
+            <a:r>
+              <a:rPr lang="en-US" altLang="ja-JP" sz="4000" dirty="0"/>
+              <a:t> </a:t>
+            </a:r>
+            <a:r>
+              <a:rPr lang="ja-JP" altLang="ja-JP" sz="4000" dirty="0"/>
+              <a:t>テーマ②</a:t>
+            </a:r>
+            <a:r>
+              <a:rPr lang="ja-JP" altLang="en-US" sz="4000" dirty="0"/>
+              <a:t>：</a:t>
+            </a:r>
+            <a:r>
+              <a:rPr lang="ja-JP" altLang="ja-JP" sz="4000" dirty="0"/>
+              <a:t>日田市3D観光マップの制作</a:t>
+            </a:r>
+            <a:endParaRPr lang="ja-JP" altLang="en-US" sz="4000" dirty="0"/>
+          </a:p>
+        </p:txBody>
+      </p:sp>
+      <p:sp>
+        <p:nvSpPr>
+          <p:cNvPr id="5" name="テキスト ボックス 4">
+            <a:extLst>
+              <a:ext uri="{FF2B5EF4-FFF2-40B4-BE49-F238E27FC236}">
+                <a16:creationId xmlns:a16="http://schemas.microsoft.com/office/drawing/2014/main" id="{3B710884-6C61-C9FD-CABF-6F661BBFBCA1}"/>
+              </a:ext>
+            </a:extLst>
+          </p:cNvPr>
+          <p:cNvSpPr txBox="1"/>
+          <p:nvPr/>
+        </p:nvSpPr>
+        <p:spPr>
+          <a:xfrm>
+            <a:off x="417202" y="1843950"/>
+            <a:ext cx="800219" cy="3170099"/>
+          </a:xfrm>
+          <a:prstGeom prst="rect">
+            <a:avLst/>
+          </a:prstGeom>
+          <a:noFill/>
+        </p:spPr>
+        <p:txBody>
+          <a:bodyPr vert="eaVert" wrap="none" rtlCol="0">
+            <a:spAutoFit/>
+          </a:bodyPr>
+          <a:lstStyle/>
+          <a:p>
+            <a:r>
+              <a:rPr lang="ja-JP" altLang="ja-JP" sz="4000" dirty="0"/>
+              <a:t>完成イメージ</a:t>
+            </a:r>
+            <a:endParaRPr lang="en-US" altLang="ja-JP" sz="4000" dirty="0"/>
+          </a:p>
+        </p:txBody>
+      </p:sp>
+      <p:pic>
+        <p:nvPicPr>
+          <p:cNvPr id="7" name="図 6">
+            <a:extLst>
+              <a:ext uri="{FF2B5EF4-FFF2-40B4-BE49-F238E27FC236}">
+                <a16:creationId xmlns:a16="http://schemas.microsoft.com/office/drawing/2014/main" id="{49593C77-80CD-ACA1-0351-91704517315B}"/>
+              </a:ext>
+            </a:extLst>
+          </p:cNvPr>
+          <p:cNvPicPr>
+            <a:picLocks noChangeAspect="1"/>
+          </p:cNvPicPr>
+          <p:nvPr/>
+        </p:nvPicPr>
+        <p:blipFill>
+          <a:blip r:embed="rId2">
+            <a:extLst>
+              <a:ext uri="{28A0092B-C50C-407E-A947-70E740481C1C}">
+                <a14:useLocalDpi xmlns:a14="http://schemas.microsoft.com/office/drawing/2010/main" val="0"/>
+              </a:ext>
+            </a:extLst>
+          </a:blip>
+          <a:stretch>
+            <a:fillRect/>
+          </a:stretch>
+        </p:blipFill>
+        <p:spPr>
+          <a:xfrm>
+            <a:off x="2099733" y="1532466"/>
+            <a:ext cx="5842000" cy="4826000"/>
+          </a:xfrm>
+          <a:prstGeom prst="rect">
+            <a:avLst/>
+          </a:prstGeom>
+          <a:ln>
+            <a:noFill/>
+          </a:ln>
+          <a:effectLst>
+            <a:softEdge rad="112500"/>
+          </a:effectLst>
+        </p:spPr>
+      </p:pic>
+    </p:spTree>
+    <p:extLst>
+      <p:ext uri="{BB962C8B-B14F-4D97-AF65-F5344CB8AC3E}">
+        <p14:creationId xmlns:p14="http://schemas.microsoft.com/office/powerpoint/2010/main" val="1649684911"/>
+      </p:ext>
+    </p:extLst>
+  </p:cSld>
+  <p:clrMapOvr>
+    <a:masterClrMapping/>
+  </p:clrMapOvr>
+</p:sld>
+</file>
+
+<file path=ppt/slides/slide8.xml><?xml version="1.0" encoding="utf-8"?>
+<p:sld xmlns:a="http://schemas.openxmlformats.org/drawingml/2006/main" xmlns:r="http://schemas.openxmlformats.org/officeDocument/2006/relationships" xmlns:p="http://schemas.openxmlformats.org/presentationml/2006/main">
+  <p:cSld>
+    <p:spTree>
+      <p:nvGrpSpPr>
+        <p:cNvPr id="1" name=""/>
+        <p:cNvGrpSpPr/>
+        <p:nvPr/>
+      </p:nvGrpSpPr>
+      <p:grpSpPr>
+        <a:xfrm>
+          <a:off x="0" y="0"/>
+          <a:ext cx="0" cy="0"/>
+          <a:chOff x="0" y="0"/>
+          <a:chExt cx="0" cy="0"/>
+        </a:xfrm>
+      </p:grpSpPr>
+      <p:sp>
+        <p:nvSpPr>
+          <p:cNvPr id="2" name="テキスト ボックス 1">
+            <a:extLst>
+              <a:ext uri="{FF2B5EF4-FFF2-40B4-BE49-F238E27FC236}">
+                <a16:creationId xmlns:a16="http://schemas.microsoft.com/office/drawing/2014/main" id="{085DFDF7-597A-2941-7E00-3C60CE59A00F}"/>
+              </a:ext>
+            </a:extLst>
+          </p:cNvPr>
+          <p:cNvSpPr txBox="1"/>
+          <p:nvPr/>
+        </p:nvSpPr>
+        <p:spPr>
+          <a:xfrm>
+            <a:off x="617577" y="2413337"/>
+            <a:ext cx="10956846" cy="1015663"/>
+          </a:xfrm>
+          <a:prstGeom prst="rect">
+            <a:avLst/>
+          </a:prstGeom>
+          <a:noFill/>
+        </p:spPr>
+        <p:txBody>
+          <a:bodyPr wrap="none" rtlCol="0">
+            <a:spAutoFit/>
+          </a:bodyPr>
+          <a:lstStyle/>
+          <a:p>
+            <a:r>
+              <a:rPr lang="ja-JP" altLang="ja-JP" sz="6000" dirty="0"/>
+              <a:t>ご清聴ありがとうございました</a:t>
+            </a:r>
+            <a:endParaRPr kumimoji="1" lang="ja-JP" altLang="en-US" sz="6000" dirty="0"/>
+          </a:p>
+        </p:txBody>
+      </p:sp>
+    </p:spTree>
+    <p:extLst>
+      <p:ext uri="{BB962C8B-B14F-4D97-AF65-F5344CB8AC3E}">
+        <p14:creationId xmlns:p14="http://schemas.microsoft.com/office/powerpoint/2010/main" val="2898488789"/>
       </p:ext>
     </p:extLst>
   </p:cSld>

--- a/中間発表.pptx
+++ b/中間発表.pptx
@@ -266,7 +266,7 @@
           <a:p>
             <a:fld id="{BEDAAAC8-8BD8-4163-897B-A036D3BDFBA3}" type="datetimeFigureOut">
               <a:rPr kumimoji="1" lang="ja-JP" altLang="en-US" smtClean="0"/>
-              <a:t>2026/7/5</a:t>
+              <a:t>2026/7/6</a:t>
             </a:fld>
             <a:endParaRPr kumimoji="1" lang="ja-JP" altLang="en-US"/>
           </a:p>
@@ -496,7 +496,7 @@
           <a:p>
             <a:fld id="{BEDAAAC8-8BD8-4163-897B-A036D3BDFBA3}" type="datetimeFigureOut">
               <a:rPr kumimoji="1" lang="ja-JP" altLang="en-US" smtClean="0"/>
-              <a:t>2026/7/5</a:t>
+              <a:t>2026/7/6</a:t>
             </a:fld>
             <a:endParaRPr kumimoji="1" lang="ja-JP" altLang="en-US"/>
           </a:p>
@@ -736,7 +736,7 @@
           <a:p>
             <a:fld id="{BEDAAAC8-8BD8-4163-897B-A036D3BDFBA3}" type="datetimeFigureOut">
               <a:rPr kumimoji="1" lang="ja-JP" altLang="en-US" smtClean="0"/>
-              <a:t>2026/7/5</a:t>
+              <a:t>2026/7/6</a:t>
             </a:fld>
             <a:endParaRPr kumimoji="1" lang="ja-JP" altLang="en-US"/>
           </a:p>
@@ -966,7 +966,7 @@
           <a:p>
             <a:fld id="{BEDAAAC8-8BD8-4163-897B-A036D3BDFBA3}" type="datetimeFigureOut">
               <a:rPr kumimoji="1" lang="ja-JP" altLang="en-US" smtClean="0"/>
-              <a:t>2026/7/5</a:t>
+              <a:t>2026/7/6</a:t>
             </a:fld>
             <a:endParaRPr kumimoji="1" lang="ja-JP" altLang="en-US"/>
           </a:p>
@@ -1241,7 +1241,7 @@
           <a:p>
             <a:fld id="{BEDAAAC8-8BD8-4163-897B-A036D3BDFBA3}" type="datetimeFigureOut">
               <a:rPr kumimoji="1" lang="ja-JP" altLang="en-US" smtClean="0"/>
-              <a:t>2026/7/5</a:t>
+              <a:t>2026/7/6</a:t>
             </a:fld>
             <a:endParaRPr kumimoji="1" lang="ja-JP" altLang="en-US"/>
           </a:p>
@@ -1570,7 +1570,7 @@
           <a:p>
             <a:fld id="{BEDAAAC8-8BD8-4163-897B-A036D3BDFBA3}" type="datetimeFigureOut">
               <a:rPr kumimoji="1" lang="ja-JP" altLang="en-US" smtClean="0"/>
-              <a:t>2026/7/5</a:t>
+              <a:t>2026/7/6</a:t>
             </a:fld>
             <a:endParaRPr kumimoji="1" lang="ja-JP" altLang="en-US"/>
           </a:p>
@@ -2046,7 +2046,7 @@
           <a:p>
             <a:fld id="{BEDAAAC8-8BD8-4163-897B-A036D3BDFBA3}" type="datetimeFigureOut">
               <a:rPr kumimoji="1" lang="ja-JP" altLang="en-US" smtClean="0"/>
-              <a:t>2026/7/5</a:t>
+              <a:t>2026/7/6</a:t>
             </a:fld>
             <a:endParaRPr kumimoji="1" lang="ja-JP" altLang="en-US"/>
           </a:p>
@@ -2187,7 +2187,7 @@
           <a:p>
             <a:fld id="{BEDAAAC8-8BD8-4163-897B-A036D3BDFBA3}" type="datetimeFigureOut">
               <a:rPr kumimoji="1" lang="ja-JP" altLang="en-US" smtClean="0"/>
-              <a:t>2026/7/5</a:t>
+              <a:t>2026/7/6</a:t>
             </a:fld>
             <a:endParaRPr kumimoji="1" lang="ja-JP" altLang="en-US"/>
           </a:p>
@@ -2300,7 +2300,7 @@
           <a:p>
             <a:fld id="{BEDAAAC8-8BD8-4163-897B-A036D3BDFBA3}" type="datetimeFigureOut">
               <a:rPr kumimoji="1" lang="ja-JP" altLang="en-US" smtClean="0"/>
-              <a:t>2026/7/5</a:t>
+              <a:t>2026/7/6</a:t>
             </a:fld>
             <a:endParaRPr kumimoji="1" lang="ja-JP" altLang="en-US"/>
           </a:p>
@@ -2643,7 +2643,7 @@
           <a:p>
             <a:fld id="{BEDAAAC8-8BD8-4163-897B-A036D3BDFBA3}" type="datetimeFigureOut">
               <a:rPr kumimoji="1" lang="ja-JP" altLang="en-US" smtClean="0"/>
-              <a:t>2026/7/5</a:t>
+              <a:t>2026/7/6</a:t>
             </a:fld>
             <a:endParaRPr kumimoji="1" lang="ja-JP" altLang="en-US"/>
           </a:p>
@@ -2931,7 +2931,7 @@
           <a:p>
             <a:fld id="{BEDAAAC8-8BD8-4163-897B-A036D3BDFBA3}" type="datetimeFigureOut">
               <a:rPr kumimoji="1" lang="ja-JP" altLang="en-US" smtClean="0"/>
-              <a:t>2026/7/5</a:t>
+              <a:t>2026/7/6</a:t>
             </a:fld>
             <a:endParaRPr kumimoji="1" lang="ja-JP" altLang="en-US"/>
           </a:p>
@@ -3204,7 +3204,7 @@
           <a:p>
             <a:fld id="{BEDAAAC8-8BD8-4163-897B-A036D3BDFBA3}" type="datetimeFigureOut">
               <a:rPr kumimoji="1" lang="ja-JP" altLang="en-US" smtClean="0"/>
-              <a:t>2026/7/5</a:t>
+              <a:t>2026/7/6</a:t>
             </a:fld>
             <a:endParaRPr kumimoji="1" lang="ja-JP" altLang="en-US"/>
           </a:p>
@@ -3796,12 +3796,93 @@
           </a:p>
         </p:txBody>
       </p:sp>
+      <p:sp>
+        <p:nvSpPr>
+          <p:cNvPr id="8" name="テキスト ボックス 7">
+            <a:extLst>
+              <a:ext uri="{FF2B5EF4-FFF2-40B4-BE49-F238E27FC236}">
+                <a16:creationId xmlns:a16="http://schemas.microsoft.com/office/drawing/2014/main" id="{694E5E2B-9188-D0B9-CC9C-C41A3011C5D2}"/>
+              </a:ext>
+            </a:extLst>
+          </p:cNvPr>
+          <p:cNvSpPr txBox="1"/>
+          <p:nvPr/>
+        </p:nvSpPr>
+        <p:spPr>
+          <a:xfrm>
+            <a:off x="2436503" y="6301431"/>
+            <a:ext cx="2180405" cy="400110"/>
+          </a:xfrm>
+          <a:prstGeom prst="rect">
+            <a:avLst/>
+          </a:prstGeom>
+          <a:noFill/>
+        </p:spPr>
+        <p:txBody>
+          <a:bodyPr wrap="none" rtlCol="0">
+            <a:spAutoFit/>
+          </a:bodyPr>
+          <a:lstStyle/>
+          <a:p>
+            <a:r>
+              <a:rPr kumimoji="1" lang="ja-JP" altLang="en-US" sz="2000" dirty="0"/>
+              <a:t>学籍番号：</a:t>
+            </a:r>
+            <a:r>
+              <a:rPr lang="en-US" altLang="ja-JP" sz="2000" dirty="0"/>
+              <a:t>25098</a:t>
+            </a:r>
+            <a:endParaRPr kumimoji="1" lang="ja-JP" altLang="en-US" sz="2000" dirty="0"/>
+          </a:p>
+        </p:txBody>
+      </p:sp>
+      <p:sp>
+        <p:nvSpPr>
+          <p:cNvPr id="2" name="テキスト ボックス 1">
+            <a:extLst>
+              <a:ext uri="{FF2B5EF4-FFF2-40B4-BE49-F238E27FC236}">
+                <a16:creationId xmlns:a16="http://schemas.microsoft.com/office/drawing/2014/main" id="{5E8E59B1-948B-C223-6FD8-C9BA5BF0A6AC}"/>
+              </a:ext>
+            </a:extLst>
+          </p:cNvPr>
+          <p:cNvSpPr txBox="1"/>
+          <p:nvPr/>
+        </p:nvSpPr>
+        <p:spPr>
+          <a:xfrm>
+            <a:off x="348269" y="4871031"/>
+            <a:ext cx="4801314" cy="1015663"/>
+          </a:xfrm>
+          <a:prstGeom prst="rect">
+            <a:avLst/>
+          </a:prstGeom>
+          <a:noFill/>
+        </p:spPr>
+        <p:txBody>
+          <a:bodyPr wrap="none" rtlCol="0">
+            <a:spAutoFit/>
+          </a:bodyPr>
+          <a:lstStyle/>
+          <a:p>
+            <a:r>
+              <a:rPr lang="ja-JP" altLang="ja-JP" sz="3000" dirty="0"/>
+              <a:t>チラシの作成</a:t>
+            </a:r>
+          </a:p>
+          <a:p>
+            <a:r>
+              <a:rPr lang="ja-JP" altLang="ja-JP" sz="3000" dirty="0"/>
+              <a:t>日田市紹介サイトのチラシ</a:t>
+            </a:r>
+          </a:p>
+        </p:txBody>
+      </p:sp>
       <p:pic>
         <p:nvPicPr>
-          <p:cNvPr id="3" name="図 2">
-            <a:extLst>
-              <a:ext uri="{FF2B5EF4-FFF2-40B4-BE49-F238E27FC236}">
-                <a16:creationId xmlns:a16="http://schemas.microsoft.com/office/drawing/2014/main" id="{8386CCAC-CC9E-B471-3526-106CF8AC3E6B}"/>
+          <p:cNvPr id="10" name="図 9">
+            <a:extLst>
+              <a:ext uri="{FF2B5EF4-FFF2-40B4-BE49-F238E27FC236}">
+                <a16:creationId xmlns:a16="http://schemas.microsoft.com/office/drawing/2014/main" id="{7D994135-315C-789B-0E52-E2B55B34A2A4}"/>
               </a:ext>
             </a:extLst>
           </p:cNvPr>
@@ -3824,95 +3905,14 @@
         </p:blipFill>
         <p:spPr>
           <a:xfrm>
-            <a:off x="5401732" y="1765298"/>
-            <a:ext cx="6790267" cy="5092701"/>
+            <a:off x="5463478" y="2171557"/>
+            <a:ext cx="6728522" cy="4131733"/>
           </a:xfrm>
           <a:prstGeom prst="rect">
             <a:avLst/>
           </a:prstGeom>
         </p:spPr>
       </p:pic>
-      <p:sp>
-        <p:nvSpPr>
-          <p:cNvPr id="8" name="テキスト ボックス 7">
-            <a:extLst>
-              <a:ext uri="{FF2B5EF4-FFF2-40B4-BE49-F238E27FC236}">
-                <a16:creationId xmlns:a16="http://schemas.microsoft.com/office/drawing/2014/main" id="{694E5E2B-9188-D0B9-CC9C-C41A3011C5D2}"/>
-              </a:ext>
-            </a:extLst>
-          </p:cNvPr>
-          <p:cNvSpPr txBox="1"/>
-          <p:nvPr/>
-        </p:nvSpPr>
-        <p:spPr>
-          <a:xfrm>
-            <a:off x="2436503" y="6301431"/>
-            <a:ext cx="2180405" cy="400110"/>
-          </a:xfrm>
-          <a:prstGeom prst="rect">
-            <a:avLst/>
-          </a:prstGeom>
-          <a:noFill/>
-        </p:spPr>
-        <p:txBody>
-          <a:bodyPr wrap="none" rtlCol="0">
-            <a:spAutoFit/>
-          </a:bodyPr>
-          <a:lstStyle/>
-          <a:p>
-            <a:r>
-              <a:rPr kumimoji="1" lang="ja-JP" altLang="en-US" sz="2000" dirty="0"/>
-              <a:t>学籍番号：</a:t>
-            </a:r>
-            <a:r>
-              <a:rPr lang="en-US" altLang="ja-JP" sz="2000" dirty="0"/>
-              <a:t>25098</a:t>
-            </a:r>
-            <a:endParaRPr kumimoji="1" lang="ja-JP" altLang="en-US" sz="2000" dirty="0"/>
-          </a:p>
-        </p:txBody>
-      </p:sp>
-      <p:sp>
-        <p:nvSpPr>
-          <p:cNvPr id="2" name="テキスト ボックス 1">
-            <a:extLst>
-              <a:ext uri="{FF2B5EF4-FFF2-40B4-BE49-F238E27FC236}">
-                <a16:creationId xmlns:a16="http://schemas.microsoft.com/office/drawing/2014/main" id="{5E8E59B1-948B-C223-6FD8-C9BA5BF0A6AC}"/>
-              </a:ext>
-            </a:extLst>
-          </p:cNvPr>
-          <p:cNvSpPr txBox="1"/>
-          <p:nvPr/>
-        </p:nvSpPr>
-        <p:spPr>
-          <a:xfrm>
-            <a:off x="348269" y="4871031"/>
-            <a:ext cx="4801314" cy="1015663"/>
-          </a:xfrm>
-          <a:prstGeom prst="rect">
-            <a:avLst/>
-          </a:prstGeom>
-          <a:noFill/>
-        </p:spPr>
-        <p:txBody>
-          <a:bodyPr wrap="none" rtlCol="0">
-            <a:spAutoFit/>
-          </a:bodyPr>
-          <a:lstStyle/>
-          <a:p>
-            <a:r>
-              <a:rPr lang="ja-JP" altLang="ja-JP" sz="3000" dirty="0"/>
-              <a:t>チラシの作成</a:t>
-            </a:r>
-          </a:p>
-          <a:p>
-            <a:r>
-              <a:rPr lang="ja-JP" altLang="ja-JP" sz="3000" dirty="0"/>
-              <a:t>日田市紹介サイトのチラシ</a:t>
-            </a:r>
-          </a:p>
-        </p:txBody>
-      </p:sp>
     </p:spTree>
     <p:extLst>
       <p:ext uri="{BB962C8B-B14F-4D97-AF65-F5344CB8AC3E}">
@@ -4151,7 +4151,7 @@
         <p:spPr>
           <a:xfrm>
             <a:off x="373984" y="2436752"/>
-            <a:ext cx="5509842" cy="646331"/>
+            <a:ext cx="5955476" cy="923330"/>
           </a:xfrm>
           <a:prstGeom prst="rect">
             <a:avLst/>
@@ -4166,15 +4166,18 @@
           <a:p>
             <a:r>
               <a:rPr lang="ja-JP" altLang="ja-JP" dirty="0"/>
-              <a:t>日田市の魅力を分かりやすく発信するWebサイトを</a:t>
+              <a:t>日田市の観光、グルメ、歴史などの情報を分かりやすく</a:t>
             </a:r>
             <a:endParaRPr lang="en-US" altLang="ja-JP" dirty="0"/>
           </a:p>
           <a:p>
             <a:r>
               <a:rPr lang="ja-JP" altLang="ja-JP" dirty="0"/>
-              <a:t>制作する。</a:t>
-            </a:r>
+              <a:t>発信し、多くの人に日田市の魅力を知ってもらう。</a:t>
+            </a:r>
+          </a:p>
+          <a:p>
+            <a:endParaRPr lang="en-US" altLang="ja-JP" dirty="0"/>
           </a:p>
         </p:txBody>
       </p:sp>
@@ -4193,7 +4196,7 @@
         <p:spPr>
           <a:xfrm>
             <a:off x="373984" y="3983659"/>
-            <a:ext cx="4339650" cy="369332"/>
+            <a:ext cx="4801314" cy="369332"/>
           </a:xfrm>
           <a:prstGeom prst="rect">
             <a:avLst/>
@@ -4208,7 +4211,7 @@
           <a:p>
             <a:r>
               <a:rPr lang="ja-JP" altLang="ja-JP" dirty="0"/>
-              <a:t>日田市の魅力を広く知ってもらいたい。</a:t>
+              <a:t>日田市の魅力を多くの人に知ってもらいたい</a:t>
             </a:r>
           </a:p>
         </p:txBody>
@@ -4228,7 +4231,7 @@
         <p:spPr>
           <a:xfrm>
             <a:off x="373984" y="5528734"/>
-            <a:ext cx="5493812" cy="923330"/>
+            <a:ext cx="5493812" cy="1200329"/>
           </a:xfrm>
           <a:prstGeom prst="rect">
             <a:avLst/>
@@ -4243,22 +4246,25 @@
           <a:p>
             <a:r>
               <a:rPr lang="ja-JP" altLang="ja-JP" dirty="0"/>
-              <a:t>観光・グルメ・イベント・基本情報などを掲載し、</a:t>
+              <a:t>日田市の観光スポットやグルメ、イベント、</a:t>
             </a:r>
             <a:endParaRPr lang="en-US" altLang="ja-JP" dirty="0"/>
           </a:p>
           <a:p>
             <a:r>
               <a:rPr lang="ja-JP" altLang="ja-JP" dirty="0"/>
-              <a:t>利用者が日田市について知ることができる</a:t>
+              <a:t>基本情報などを写真とともに分かりやすく紹介し、</a:t>
             </a:r>
             <a:endParaRPr lang="en-US" altLang="ja-JP" dirty="0"/>
           </a:p>
           <a:p>
             <a:r>
               <a:rPr lang="ja-JP" altLang="ja-JP" dirty="0"/>
-              <a:t>サイトを目指す。</a:t>
-            </a:r>
+              <a:t>日田市の魅力を発信するWebサイトを制作する。</a:t>
+            </a:r>
+          </a:p>
+          <a:p>
+            <a:endParaRPr lang="en-US" altLang="ja-JP" dirty="0"/>
           </a:p>
         </p:txBody>
       </p:sp>
@@ -5675,7 +5681,7 @@
         <p:spPr>
           <a:xfrm>
             <a:off x="373984" y="2436752"/>
-            <a:ext cx="5562741" cy="646331"/>
+            <a:ext cx="5503430" cy="646331"/>
           </a:xfrm>
           <a:prstGeom prst="rect">
             <a:avLst/>
@@ -5690,14 +5696,14 @@
           <a:p>
             <a:r>
               <a:rPr lang="ja-JP" altLang="ja-JP" dirty="0"/>
-              <a:t>3D観光マップを制作し、観光地の位置関係を分かり</a:t>
+              <a:t>Three.jsを用いて日田市の3D観光マップを制作し、</a:t>
             </a:r>
             <a:endParaRPr lang="en-US" altLang="ja-JP" dirty="0"/>
           </a:p>
           <a:p>
             <a:r>
               <a:rPr lang="ja-JP" altLang="ja-JP" dirty="0"/>
-              <a:t>やすく伝え、観光ルートの検討を支援する。</a:t>
+              <a:t>観光スポットを分かりやすく紹介する。</a:t>
             </a:r>
             <a:endParaRPr lang="en-US" altLang="ja-JP" dirty="0"/>
           </a:p>
@@ -5718,7 +5724,7 @@
         <p:spPr>
           <a:xfrm>
             <a:off x="373984" y="3983659"/>
-            <a:ext cx="5562741" cy="646331"/>
+            <a:ext cx="5101076" cy="646331"/>
           </a:xfrm>
           <a:prstGeom prst="rect">
             <a:avLst/>
@@ -5733,23 +5739,16 @@
           <a:p>
             <a:r>
               <a:rPr lang="ja-JP" altLang="ja-JP" dirty="0"/>
-              <a:t>従来の地図では伝わりにくい位置関係を、</a:t>
-            </a:r>
-            <a:r>
-              <a:rPr lang="en-US" altLang="ja-JP" dirty="0"/>
-              <a:t>3D</a:t>
-            </a:r>
+              <a:t>3D技術を活用して、観光スポットの位置関係を</a:t>
+            </a:r>
+            <a:endParaRPr lang="en-US" altLang="ja-JP" dirty="0"/>
+          </a:p>
+          <a:p>
             <a:r>
               <a:rPr lang="ja-JP" altLang="ja-JP" dirty="0"/>
-              <a:t>技術を</a:t>
+              <a:t>より分かりやすく伝えたいと考えた。</a:t>
             </a:r>
             <a:endParaRPr lang="en-US" altLang="ja-JP" dirty="0"/>
-          </a:p>
-          <a:p>
-            <a:r>
-              <a:rPr lang="ja-JP" altLang="ja-JP" dirty="0"/>
-              <a:t>使って分かりやすく伝えたい。</a:t>
-            </a:r>
           </a:p>
         </p:txBody>
       </p:sp>
@@ -5768,7 +5767,7 @@
         <p:spPr>
           <a:xfrm>
             <a:off x="373984" y="5528734"/>
-            <a:ext cx="5509842" cy="646331"/>
+            <a:ext cx="5032147" cy="923330"/>
           </a:xfrm>
           <a:prstGeom prst="rect">
             <a:avLst/>
@@ -5783,14 +5782,21 @@
           <a:p>
             <a:r>
               <a:rPr lang="ja-JP" altLang="ja-JP" dirty="0"/>
-              <a:t>3Dマップを操作しながら観光スポットを確認し、</a:t>
+              <a:t>日田市を簡略化した3Dマップに、テーマ①で</a:t>
             </a:r>
             <a:endParaRPr lang="en-US" altLang="ja-JP" dirty="0"/>
           </a:p>
           <a:p>
             <a:r>
               <a:rPr lang="ja-JP" altLang="ja-JP" dirty="0"/>
-              <a:t>紹介サイトへ遷移できるWebコンテンツを目指す。</a:t>
+              <a:t>紹介した観光スポットを配置し、マウス操作や</a:t>
+            </a:r>
+            <a:endParaRPr lang="en-US" altLang="ja-JP" dirty="0"/>
+          </a:p>
+          <a:p>
+            <a:r>
+              <a:rPr lang="ja-JP" altLang="ja-JP" dirty="0"/>
+              <a:t>クリックで観光情報を閲覧できるようにする</a:t>
             </a:r>
             <a:endParaRPr lang="ja-JP" altLang="en-US" dirty="0"/>
           </a:p>

--- a/中間発表.pptx
+++ b/中間発表.pptx
@@ -3723,7 +3723,7 @@
         </p:nvSpPr>
         <p:spPr>
           <a:xfrm>
-            <a:off x="376796" y="3396992"/>
+            <a:off x="348269" y="3418811"/>
             <a:ext cx="4916731" cy="1015663"/>
           </a:xfrm>
           <a:prstGeom prst="rect">
@@ -3774,7 +3774,7 @@
         </p:nvSpPr>
         <p:spPr>
           <a:xfrm>
-            <a:off x="348269" y="6301431"/>
+            <a:off x="338725" y="4871030"/>
             <a:ext cx="1980029" cy="400110"/>
           </a:xfrm>
           <a:prstGeom prst="rect">
@@ -3810,7 +3810,7 @@
         </p:nvSpPr>
         <p:spPr>
           <a:xfrm>
-            <a:off x="2436503" y="6301431"/>
+            <a:off x="348269" y="5271140"/>
             <a:ext cx="2180405" cy="400110"/>
           </a:xfrm>
           <a:prstGeom prst="rect">
@@ -3833,47 +3833,6 @@
               <a:t>25098</a:t>
             </a:r>
             <a:endParaRPr kumimoji="1" lang="ja-JP" altLang="en-US" sz="2000" dirty="0"/>
-          </a:p>
-        </p:txBody>
-      </p:sp>
-      <p:sp>
-        <p:nvSpPr>
-          <p:cNvPr id="2" name="テキスト ボックス 1">
-            <a:extLst>
-              <a:ext uri="{FF2B5EF4-FFF2-40B4-BE49-F238E27FC236}">
-                <a16:creationId xmlns:a16="http://schemas.microsoft.com/office/drawing/2014/main" id="{5E8E59B1-948B-C223-6FD8-C9BA5BF0A6AC}"/>
-              </a:ext>
-            </a:extLst>
-          </p:cNvPr>
-          <p:cNvSpPr txBox="1"/>
-          <p:nvPr/>
-        </p:nvSpPr>
-        <p:spPr>
-          <a:xfrm>
-            <a:off x="348269" y="4871031"/>
-            <a:ext cx="4801314" cy="1015663"/>
-          </a:xfrm>
-          <a:prstGeom prst="rect">
-            <a:avLst/>
-          </a:prstGeom>
-          <a:noFill/>
-        </p:spPr>
-        <p:txBody>
-          <a:bodyPr wrap="none" rtlCol="0">
-            <a:spAutoFit/>
-          </a:bodyPr>
-          <a:lstStyle/>
-          <a:p>
-            <a:r>
-              <a:rPr lang="ja-JP" altLang="ja-JP" sz="3000" dirty="0"/>
-              <a:t>チラシの作成</a:t>
-            </a:r>
-          </a:p>
-          <a:p>
-            <a:r>
-              <a:rPr lang="ja-JP" altLang="ja-JP" sz="3000" dirty="0"/>
-              <a:t>日田市紹介サイトのチラシ</a:t>
-            </a:r>
           </a:p>
         </p:txBody>
       </p:sp>
